--- a/宣道詩/(宣道詩5)穩當的根基.pptx
+++ b/宣道詩/(宣道詩5)穩當的根基.pptx
@@ -5,12 +5,25 @@
     <p:sldMasterId id="2147483660" r:id="rId1"/>
   </p:sldMasterIdLst>
   <p:sldIdLst>
-    <p:sldId id="257" r:id="rId2"/>
-    <p:sldId id="258" r:id="rId3"/>
-    <p:sldId id="259" r:id="rId4"/>
-    <p:sldId id="260" r:id="rId5"/>
-    <p:sldId id="261" r:id="rId6"/>
-    <p:sldId id="262" r:id="rId7"/>
+    <p:sldId id="596" r:id="rId2"/>
+    <p:sldId id="412" r:id="rId3"/>
+    <p:sldId id="597" r:id="rId4"/>
+    <p:sldId id="598" r:id="rId5"/>
+    <p:sldId id="599" r:id="rId6"/>
+    <p:sldId id="600" r:id="rId7"/>
+    <p:sldId id="601" r:id="rId8"/>
+    <p:sldId id="602" r:id="rId9"/>
+    <p:sldId id="603" r:id="rId10"/>
+    <p:sldId id="604" r:id="rId11"/>
+    <p:sldId id="605" r:id="rId12"/>
+    <p:sldId id="606" r:id="rId13"/>
+    <p:sldId id="607" r:id="rId14"/>
+    <p:sldId id="608" r:id="rId15"/>
+    <p:sldId id="609" r:id="rId16"/>
+    <p:sldId id="610" r:id="rId17"/>
+    <p:sldId id="611" r:id="rId18"/>
+    <p:sldId id="612" r:id="rId19"/>
+    <p:sldId id="613" r:id="rId20"/>
   </p:sldIdLst>
   <p:sldSz cx="12192000" cy="6858000"/>
   <p:notesSz cx="6858000" cy="9144000"/>
@@ -109,6 +122,11 @@
       </a:defRPr>
     </a:lvl9pPr>
   </p:defaultTextStyle>
+  <p:extLst>
+    <p:ext uri="{EFAFB233-063F-42B5-8137-9DF3F51BA10A}">
+      <p15:sldGuideLst xmlns:p15="http://schemas.microsoft.com/office/powerpoint/2012/main"/>
+    </p:ext>
+  </p:extLst>
 </p:presentation>
 </file>
 
@@ -150,7 +168,7 @@
           <a:lstStyle/>
           <a:p>
             <a:r>
-              <a:rPr lang="en-US" altLang="zh-TW" smtClean="0"/>
+              <a:rPr lang="en-US" altLang="zh-TW"/>
               <a:t>Click to edit Master title style</a:t>
             </a:r>
             <a:endParaRPr lang="zh-TW" altLang="en-US"/>
@@ -269,7 +287,7 @@
           </a:lstStyle>
           <a:p>
             <a:r>
-              <a:rPr lang="en-US" altLang="zh-TW" smtClean="0"/>
+              <a:rPr lang="en-US" altLang="zh-TW"/>
               <a:t>Click to edit Master subtitle style</a:t>
             </a:r>
             <a:endParaRPr lang="zh-TW" altLang="en-US"/>
@@ -293,7 +311,7 @@
           <a:p>
             <a:fld id="{40A16B52-FA7A-4E3C-A76E-4F45B92C2877}" type="datetimeFigureOut">
               <a:rPr lang="vi-VN" smtClean="0"/>
-              <a:t>26/08/2020</a:t>
+              <a:t>18/01/2025</a:t>
             </a:fld>
             <a:endParaRPr lang="vi-VN"/>
           </a:p>
@@ -387,7 +405,7 @@
           <a:lstStyle/>
           <a:p>
             <a:r>
-              <a:rPr lang="en-US" altLang="zh-TW" smtClean="0"/>
+              <a:rPr lang="en-US" altLang="zh-TW"/>
               <a:t>Click to edit Master title style</a:t>
             </a:r>
             <a:endParaRPr lang="zh-TW" altLang="en-US"/>
@@ -411,35 +429,35 @@
           <a:p>
             <a:pPr lvl="0"/>
             <a:r>
-              <a:rPr lang="en-US" altLang="zh-TW" smtClean="0"/>
+              <a:rPr lang="en-US" altLang="zh-TW"/>
               <a:t>Edit Master text styles</a:t>
             </a:r>
           </a:p>
           <a:p>
             <a:pPr lvl="1"/>
             <a:r>
-              <a:rPr lang="en-US" altLang="zh-TW" smtClean="0"/>
+              <a:rPr lang="en-US" altLang="zh-TW"/>
               <a:t>Second level</a:t>
             </a:r>
           </a:p>
           <a:p>
             <a:pPr lvl="2"/>
             <a:r>
-              <a:rPr lang="en-US" altLang="zh-TW" smtClean="0"/>
+              <a:rPr lang="en-US" altLang="zh-TW"/>
               <a:t>Third level</a:t>
             </a:r>
           </a:p>
           <a:p>
             <a:pPr lvl="3"/>
             <a:r>
-              <a:rPr lang="en-US" altLang="zh-TW" smtClean="0"/>
+              <a:rPr lang="en-US" altLang="zh-TW"/>
               <a:t>Fourth level</a:t>
             </a:r>
           </a:p>
           <a:p>
             <a:pPr lvl="4"/>
             <a:r>
-              <a:rPr lang="en-US" altLang="zh-TW" smtClean="0"/>
+              <a:rPr lang="en-US" altLang="zh-TW"/>
               <a:t>Fifth level</a:t>
             </a:r>
             <a:endParaRPr lang="zh-TW" altLang="en-US"/>
@@ -463,7 +481,7 @@
           <a:p>
             <a:fld id="{40A16B52-FA7A-4E3C-A76E-4F45B92C2877}" type="datetimeFigureOut">
               <a:rPr lang="vi-VN" smtClean="0"/>
-              <a:t>26/08/2020</a:t>
+              <a:t>18/01/2025</a:t>
             </a:fld>
             <a:endParaRPr lang="vi-VN"/>
           </a:p>
@@ -562,7 +580,7 @@
           <a:lstStyle/>
           <a:p>
             <a:r>
-              <a:rPr lang="en-US" altLang="zh-TW" smtClean="0"/>
+              <a:rPr lang="en-US" altLang="zh-TW"/>
               <a:t>Click to edit Master title style</a:t>
             </a:r>
             <a:endParaRPr lang="zh-TW" altLang="en-US"/>
@@ -591,35 +609,35 @@
           <a:p>
             <a:pPr lvl="0"/>
             <a:r>
-              <a:rPr lang="en-US" altLang="zh-TW" smtClean="0"/>
+              <a:rPr lang="en-US" altLang="zh-TW"/>
               <a:t>Edit Master text styles</a:t>
             </a:r>
           </a:p>
           <a:p>
             <a:pPr lvl="1"/>
             <a:r>
-              <a:rPr lang="en-US" altLang="zh-TW" smtClean="0"/>
+              <a:rPr lang="en-US" altLang="zh-TW"/>
               <a:t>Second level</a:t>
             </a:r>
           </a:p>
           <a:p>
             <a:pPr lvl="2"/>
             <a:r>
-              <a:rPr lang="en-US" altLang="zh-TW" smtClean="0"/>
+              <a:rPr lang="en-US" altLang="zh-TW"/>
               <a:t>Third level</a:t>
             </a:r>
           </a:p>
           <a:p>
             <a:pPr lvl="3"/>
             <a:r>
-              <a:rPr lang="en-US" altLang="zh-TW" smtClean="0"/>
+              <a:rPr lang="en-US" altLang="zh-TW"/>
               <a:t>Fourth level</a:t>
             </a:r>
           </a:p>
           <a:p>
             <a:pPr lvl="4"/>
             <a:r>
-              <a:rPr lang="en-US" altLang="zh-TW" smtClean="0"/>
+              <a:rPr lang="en-US" altLang="zh-TW"/>
               <a:t>Fifth level</a:t>
             </a:r>
             <a:endParaRPr lang="zh-TW" altLang="en-US"/>
@@ -643,7 +661,7 @@
           <a:p>
             <a:fld id="{40A16B52-FA7A-4E3C-A76E-4F45B92C2877}" type="datetimeFigureOut">
               <a:rPr lang="vi-VN" smtClean="0"/>
-              <a:t>26/08/2020</a:t>
+              <a:t>18/01/2025</a:t>
             </a:fld>
             <a:endParaRPr lang="vi-VN"/>
           </a:p>
@@ -737,7 +755,7 @@
           <a:lstStyle/>
           <a:p>
             <a:r>
-              <a:rPr lang="en-US" altLang="zh-TW" smtClean="0"/>
+              <a:rPr lang="en-US" altLang="zh-TW"/>
               <a:t>Click to edit Master title style</a:t>
             </a:r>
             <a:endParaRPr lang="zh-TW" altLang="en-US"/>
@@ -761,35 +779,35 @@
           <a:p>
             <a:pPr lvl="0"/>
             <a:r>
-              <a:rPr lang="en-US" altLang="zh-TW" smtClean="0"/>
+              <a:rPr lang="en-US" altLang="zh-TW"/>
               <a:t>Edit Master text styles</a:t>
             </a:r>
           </a:p>
           <a:p>
             <a:pPr lvl="1"/>
             <a:r>
-              <a:rPr lang="en-US" altLang="zh-TW" smtClean="0"/>
+              <a:rPr lang="en-US" altLang="zh-TW"/>
               <a:t>Second level</a:t>
             </a:r>
           </a:p>
           <a:p>
             <a:pPr lvl="2"/>
             <a:r>
-              <a:rPr lang="en-US" altLang="zh-TW" smtClean="0"/>
+              <a:rPr lang="en-US" altLang="zh-TW"/>
               <a:t>Third level</a:t>
             </a:r>
           </a:p>
           <a:p>
             <a:pPr lvl="3"/>
             <a:r>
-              <a:rPr lang="en-US" altLang="zh-TW" smtClean="0"/>
+              <a:rPr lang="en-US" altLang="zh-TW"/>
               <a:t>Fourth level</a:t>
             </a:r>
           </a:p>
           <a:p>
             <a:pPr lvl="4"/>
             <a:r>
-              <a:rPr lang="en-US" altLang="zh-TW" smtClean="0"/>
+              <a:rPr lang="en-US" altLang="zh-TW"/>
               <a:t>Fifth level</a:t>
             </a:r>
             <a:endParaRPr lang="zh-TW" altLang="en-US"/>
@@ -813,7 +831,7 @@
           <a:p>
             <a:fld id="{40A16B52-FA7A-4E3C-A76E-4F45B92C2877}" type="datetimeFigureOut">
               <a:rPr lang="vi-VN" smtClean="0"/>
-              <a:t>26/08/2020</a:t>
+              <a:t>18/01/2025</a:t>
             </a:fld>
             <a:endParaRPr lang="vi-VN"/>
           </a:p>
@@ -916,7 +934,7 @@
           </a:lstStyle>
           <a:p>
             <a:r>
-              <a:rPr lang="en-US" altLang="zh-TW" smtClean="0"/>
+              <a:rPr lang="en-US" altLang="zh-TW"/>
               <a:t>Click to edit Master title style</a:t>
             </a:r>
             <a:endParaRPr lang="zh-TW" altLang="en-US"/>
@@ -1036,7 +1054,7 @@
           <a:p>
             <a:pPr lvl="0"/>
             <a:r>
-              <a:rPr lang="en-US" altLang="zh-TW" smtClean="0"/>
+              <a:rPr lang="en-US" altLang="zh-TW"/>
               <a:t>Edit Master text styles</a:t>
             </a:r>
           </a:p>
@@ -1059,7 +1077,7 @@
           <a:p>
             <a:fld id="{40A16B52-FA7A-4E3C-A76E-4F45B92C2877}" type="datetimeFigureOut">
               <a:rPr lang="vi-VN" smtClean="0"/>
-              <a:t>26/08/2020</a:t>
+              <a:t>18/01/2025</a:t>
             </a:fld>
             <a:endParaRPr lang="vi-VN"/>
           </a:p>
@@ -1153,7 +1171,7 @@
           <a:lstStyle/>
           <a:p>
             <a:r>
-              <a:rPr lang="en-US" altLang="zh-TW" smtClean="0"/>
+              <a:rPr lang="en-US" altLang="zh-TW"/>
               <a:t>Click to edit Master title style</a:t>
             </a:r>
             <a:endParaRPr lang="zh-TW" altLang="en-US"/>
@@ -1210,35 +1228,35 @@
           <a:p>
             <a:pPr lvl="0"/>
             <a:r>
-              <a:rPr lang="en-US" altLang="zh-TW" smtClean="0"/>
+              <a:rPr lang="en-US" altLang="zh-TW"/>
               <a:t>Edit Master text styles</a:t>
             </a:r>
           </a:p>
           <a:p>
             <a:pPr lvl="1"/>
             <a:r>
-              <a:rPr lang="en-US" altLang="zh-TW" smtClean="0"/>
+              <a:rPr lang="en-US" altLang="zh-TW"/>
               <a:t>Second level</a:t>
             </a:r>
           </a:p>
           <a:p>
             <a:pPr lvl="2"/>
             <a:r>
-              <a:rPr lang="en-US" altLang="zh-TW" smtClean="0"/>
+              <a:rPr lang="en-US" altLang="zh-TW"/>
               <a:t>Third level</a:t>
             </a:r>
           </a:p>
           <a:p>
             <a:pPr lvl="3"/>
             <a:r>
-              <a:rPr lang="en-US" altLang="zh-TW" smtClean="0"/>
+              <a:rPr lang="en-US" altLang="zh-TW"/>
               <a:t>Fourth level</a:t>
             </a:r>
           </a:p>
           <a:p>
             <a:pPr lvl="4"/>
             <a:r>
-              <a:rPr lang="en-US" altLang="zh-TW" smtClean="0"/>
+              <a:rPr lang="en-US" altLang="zh-TW"/>
               <a:t>Fifth level</a:t>
             </a:r>
             <a:endParaRPr lang="zh-TW" altLang="en-US"/>
@@ -1295,35 +1313,35 @@
           <a:p>
             <a:pPr lvl="0"/>
             <a:r>
-              <a:rPr lang="en-US" altLang="zh-TW" smtClean="0"/>
+              <a:rPr lang="en-US" altLang="zh-TW"/>
               <a:t>Edit Master text styles</a:t>
             </a:r>
           </a:p>
           <a:p>
             <a:pPr lvl="1"/>
             <a:r>
-              <a:rPr lang="en-US" altLang="zh-TW" smtClean="0"/>
+              <a:rPr lang="en-US" altLang="zh-TW"/>
               <a:t>Second level</a:t>
             </a:r>
           </a:p>
           <a:p>
             <a:pPr lvl="2"/>
             <a:r>
-              <a:rPr lang="en-US" altLang="zh-TW" smtClean="0"/>
+              <a:rPr lang="en-US" altLang="zh-TW"/>
               <a:t>Third level</a:t>
             </a:r>
           </a:p>
           <a:p>
             <a:pPr lvl="3"/>
             <a:r>
-              <a:rPr lang="en-US" altLang="zh-TW" smtClean="0"/>
+              <a:rPr lang="en-US" altLang="zh-TW"/>
               <a:t>Fourth level</a:t>
             </a:r>
           </a:p>
           <a:p>
             <a:pPr lvl="4"/>
             <a:r>
-              <a:rPr lang="en-US" altLang="zh-TW" smtClean="0"/>
+              <a:rPr lang="en-US" altLang="zh-TW"/>
               <a:t>Fifth level</a:t>
             </a:r>
             <a:endParaRPr lang="zh-TW" altLang="en-US"/>
@@ -1347,7 +1365,7 @@
           <a:p>
             <a:fld id="{40A16B52-FA7A-4E3C-A76E-4F45B92C2877}" type="datetimeFigureOut">
               <a:rPr lang="vi-VN" smtClean="0"/>
-              <a:t>26/08/2020</a:t>
+              <a:t>18/01/2025</a:t>
             </a:fld>
             <a:endParaRPr lang="vi-VN"/>
           </a:p>
@@ -1445,7 +1463,7 @@
           </a:lstStyle>
           <a:p>
             <a:r>
-              <a:rPr lang="en-US" altLang="zh-TW" smtClean="0"/>
+              <a:rPr lang="en-US" altLang="zh-TW"/>
               <a:t>Click to edit Master title style</a:t>
             </a:r>
             <a:endParaRPr lang="zh-TW" altLang="en-US"/>
@@ -1511,7 +1529,7 @@
           <a:p>
             <a:pPr lvl="0"/>
             <a:r>
-              <a:rPr lang="en-US" altLang="zh-TW" smtClean="0"/>
+              <a:rPr lang="en-US" altLang="zh-TW"/>
               <a:t>Edit Master text styles</a:t>
             </a:r>
           </a:p>
@@ -1567,35 +1585,35 @@
           <a:p>
             <a:pPr lvl="0"/>
             <a:r>
-              <a:rPr lang="en-US" altLang="zh-TW" smtClean="0"/>
+              <a:rPr lang="en-US" altLang="zh-TW"/>
               <a:t>Edit Master text styles</a:t>
             </a:r>
           </a:p>
           <a:p>
             <a:pPr lvl="1"/>
             <a:r>
-              <a:rPr lang="en-US" altLang="zh-TW" smtClean="0"/>
+              <a:rPr lang="en-US" altLang="zh-TW"/>
               <a:t>Second level</a:t>
             </a:r>
           </a:p>
           <a:p>
             <a:pPr lvl="2"/>
             <a:r>
-              <a:rPr lang="en-US" altLang="zh-TW" smtClean="0"/>
+              <a:rPr lang="en-US" altLang="zh-TW"/>
               <a:t>Third level</a:t>
             </a:r>
           </a:p>
           <a:p>
             <a:pPr lvl="3"/>
             <a:r>
-              <a:rPr lang="en-US" altLang="zh-TW" smtClean="0"/>
+              <a:rPr lang="en-US" altLang="zh-TW"/>
               <a:t>Fourth level</a:t>
             </a:r>
           </a:p>
           <a:p>
             <a:pPr lvl="4"/>
             <a:r>
-              <a:rPr lang="en-US" altLang="zh-TW" smtClean="0"/>
+              <a:rPr lang="en-US" altLang="zh-TW"/>
               <a:t>Fifth level</a:t>
             </a:r>
             <a:endParaRPr lang="zh-TW" altLang="en-US"/>
@@ -1661,7 +1679,7 @@
           <a:p>
             <a:pPr lvl="0"/>
             <a:r>
-              <a:rPr lang="en-US" altLang="zh-TW" smtClean="0"/>
+              <a:rPr lang="en-US" altLang="zh-TW"/>
               <a:t>Edit Master text styles</a:t>
             </a:r>
           </a:p>
@@ -1717,35 +1735,35 @@
           <a:p>
             <a:pPr lvl="0"/>
             <a:r>
-              <a:rPr lang="en-US" altLang="zh-TW" smtClean="0"/>
+              <a:rPr lang="en-US" altLang="zh-TW"/>
               <a:t>Edit Master text styles</a:t>
             </a:r>
           </a:p>
           <a:p>
             <a:pPr lvl="1"/>
             <a:r>
-              <a:rPr lang="en-US" altLang="zh-TW" smtClean="0"/>
+              <a:rPr lang="en-US" altLang="zh-TW"/>
               <a:t>Second level</a:t>
             </a:r>
           </a:p>
           <a:p>
             <a:pPr lvl="2"/>
             <a:r>
-              <a:rPr lang="en-US" altLang="zh-TW" smtClean="0"/>
+              <a:rPr lang="en-US" altLang="zh-TW"/>
               <a:t>Third level</a:t>
             </a:r>
           </a:p>
           <a:p>
             <a:pPr lvl="3"/>
             <a:r>
-              <a:rPr lang="en-US" altLang="zh-TW" smtClean="0"/>
+              <a:rPr lang="en-US" altLang="zh-TW"/>
               <a:t>Fourth level</a:t>
             </a:r>
           </a:p>
           <a:p>
             <a:pPr lvl="4"/>
             <a:r>
-              <a:rPr lang="en-US" altLang="zh-TW" smtClean="0"/>
+              <a:rPr lang="en-US" altLang="zh-TW"/>
               <a:t>Fifth level</a:t>
             </a:r>
             <a:endParaRPr lang="zh-TW" altLang="en-US"/>
@@ -1769,7 +1787,7 @@
           <a:p>
             <a:fld id="{40A16B52-FA7A-4E3C-A76E-4F45B92C2877}" type="datetimeFigureOut">
               <a:rPr lang="vi-VN" smtClean="0"/>
-              <a:t>26/08/2020</a:t>
+              <a:t>18/01/2025</a:t>
             </a:fld>
             <a:endParaRPr lang="vi-VN"/>
           </a:p>
@@ -1863,7 +1881,7 @@
           <a:lstStyle/>
           <a:p>
             <a:r>
-              <a:rPr lang="en-US" altLang="zh-TW" smtClean="0"/>
+              <a:rPr lang="en-US" altLang="zh-TW"/>
               <a:t>Click to edit Master title style</a:t>
             </a:r>
             <a:endParaRPr lang="zh-TW" altLang="en-US"/>
@@ -1887,7 +1905,7 @@
           <a:p>
             <a:fld id="{40A16B52-FA7A-4E3C-A76E-4F45B92C2877}" type="datetimeFigureOut">
               <a:rPr lang="vi-VN" smtClean="0"/>
-              <a:t>26/08/2020</a:t>
+              <a:t>18/01/2025</a:t>
             </a:fld>
             <a:endParaRPr lang="vi-VN"/>
           </a:p>
@@ -1982,7 +2000,7 @@
           <a:p>
             <a:fld id="{40A16B52-FA7A-4E3C-A76E-4F45B92C2877}" type="datetimeFigureOut">
               <a:rPr lang="vi-VN" smtClean="0"/>
-              <a:t>26/08/2020</a:t>
+              <a:t>18/01/2025</a:t>
             </a:fld>
             <a:endParaRPr lang="vi-VN"/>
           </a:p>
@@ -2085,7 +2103,7 @@
           </a:lstStyle>
           <a:p>
             <a:r>
-              <a:rPr lang="en-US" altLang="zh-TW" smtClean="0"/>
+              <a:rPr lang="en-US" altLang="zh-TW"/>
               <a:t>Click to edit Master title style</a:t>
             </a:r>
             <a:endParaRPr lang="zh-TW" altLang="en-US"/>
@@ -2142,35 +2160,35 @@
           <a:p>
             <a:pPr lvl="0"/>
             <a:r>
-              <a:rPr lang="en-US" altLang="zh-TW" smtClean="0"/>
+              <a:rPr lang="en-US" altLang="zh-TW"/>
               <a:t>Edit Master text styles</a:t>
             </a:r>
           </a:p>
           <a:p>
             <a:pPr lvl="1"/>
             <a:r>
-              <a:rPr lang="en-US" altLang="zh-TW" smtClean="0"/>
+              <a:rPr lang="en-US" altLang="zh-TW"/>
               <a:t>Second level</a:t>
             </a:r>
           </a:p>
           <a:p>
             <a:pPr lvl="2"/>
             <a:r>
-              <a:rPr lang="en-US" altLang="zh-TW" smtClean="0"/>
+              <a:rPr lang="en-US" altLang="zh-TW"/>
               <a:t>Third level</a:t>
             </a:r>
           </a:p>
           <a:p>
             <a:pPr lvl="3"/>
             <a:r>
-              <a:rPr lang="en-US" altLang="zh-TW" smtClean="0"/>
+              <a:rPr lang="en-US" altLang="zh-TW"/>
               <a:t>Fourth level</a:t>
             </a:r>
           </a:p>
           <a:p>
             <a:pPr lvl="4"/>
             <a:r>
-              <a:rPr lang="en-US" altLang="zh-TW" smtClean="0"/>
+              <a:rPr lang="en-US" altLang="zh-TW"/>
               <a:t>Fifth level</a:t>
             </a:r>
             <a:endParaRPr lang="zh-TW" altLang="en-US"/>
@@ -2236,7 +2254,7 @@
           <a:p>
             <a:pPr lvl="0"/>
             <a:r>
-              <a:rPr lang="en-US" altLang="zh-TW" smtClean="0"/>
+              <a:rPr lang="en-US" altLang="zh-TW"/>
               <a:t>Edit Master text styles</a:t>
             </a:r>
           </a:p>
@@ -2259,7 +2277,7 @@
           <a:p>
             <a:fld id="{40A16B52-FA7A-4E3C-A76E-4F45B92C2877}" type="datetimeFigureOut">
               <a:rPr lang="vi-VN" smtClean="0"/>
-              <a:t>26/08/2020</a:t>
+              <a:t>18/01/2025</a:t>
             </a:fld>
             <a:endParaRPr lang="vi-VN"/>
           </a:p>
@@ -2362,7 +2380,7 @@
           </a:lstStyle>
           <a:p>
             <a:r>
-              <a:rPr lang="en-US" altLang="zh-TW" smtClean="0"/>
+              <a:rPr lang="en-US" altLang="zh-TW"/>
               <a:t>Click to edit Master title style</a:t>
             </a:r>
             <a:endParaRPr lang="zh-TW" altLang="en-US"/>
@@ -2427,7 +2445,7 @@
           </a:lstStyle>
           <a:p>
             <a:r>
-              <a:rPr lang="en-US" altLang="zh-TW" smtClean="0"/>
+              <a:rPr lang="en-US" altLang="zh-TW"/>
               <a:t>Click icon to add picture</a:t>
             </a:r>
             <a:endParaRPr lang="zh-TW" altLang="en-US"/>
@@ -2493,7 +2511,7 @@
           <a:p>
             <a:pPr lvl="0"/>
             <a:r>
-              <a:rPr lang="en-US" altLang="zh-TW" smtClean="0"/>
+              <a:rPr lang="en-US" altLang="zh-TW"/>
               <a:t>Edit Master text styles</a:t>
             </a:r>
           </a:p>
@@ -2516,7 +2534,7 @@
           <a:p>
             <a:fld id="{40A16B52-FA7A-4E3C-A76E-4F45B92C2877}" type="datetimeFigureOut">
               <a:rPr lang="vi-VN" smtClean="0"/>
-              <a:t>26/08/2020</a:t>
+              <a:t>18/01/2025</a:t>
             </a:fld>
             <a:endParaRPr lang="vi-VN"/>
           </a:p>
@@ -2630,10 +2648,9 @@
           <a:lstStyle/>
           <a:p>
             <a:r>
-              <a:rPr lang="zh-TW" altLang="en-US" smtClean="0"/>
+              <a:rPr lang="zh-TW" altLang="en-US"/>
               <a:t>按一下以編輯母片標題樣式</a:t>
             </a:r>
-            <a:endParaRPr lang="zh-TW" altLang="en-US"/>
           </a:p>
         </p:txBody>
       </p:sp>
@@ -2664,38 +2681,37 @@
           <a:p>
             <a:pPr lvl="0"/>
             <a:r>
-              <a:rPr lang="zh-TW" altLang="en-US" smtClean="0"/>
+              <a:rPr lang="zh-TW" altLang="en-US"/>
               <a:t>按一下以編輯母片文字樣式</a:t>
             </a:r>
           </a:p>
           <a:p>
             <a:pPr lvl="1"/>
             <a:r>
-              <a:rPr lang="zh-TW" altLang="en-US" smtClean="0"/>
+              <a:rPr lang="zh-TW" altLang="en-US"/>
               <a:t>第二層</a:t>
             </a:r>
           </a:p>
           <a:p>
             <a:pPr lvl="2"/>
             <a:r>
-              <a:rPr lang="zh-TW" altLang="en-US" smtClean="0"/>
+              <a:rPr lang="zh-TW" altLang="en-US"/>
               <a:t>第三層</a:t>
             </a:r>
           </a:p>
           <a:p>
             <a:pPr lvl="3"/>
             <a:r>
-              <a:rPr lang="zh-TW" altLang="en-US" smtClean="0"/>
+              <a:rPr lang="zh-TW" altLang="en-US"/>
               <a:t>第四層</a:t>
             </a:r>
           </a:p>
           <a:p>
             <a:pPr lvl="4"/>
             <a:r>
-              <a:rPr lang="zh-TW" altLang="en-US" smtClean="0"/>
+              <a:rPr lang="zh-TW" altLang="en-US"/>
               <a:t>第五層</a:t>
             </a:r>
-            <a:endParaRPr lang="zh-TW" altLang="en-US"/>
           </a:p>
         </p:txBody>
       </p:sp>
@@ -2734,7 +2750,7 @@
           <a:p>
             <a:fld id="{40A16B52-FA7A-4E3C-A76E-4F45B92C2877}" type="datetimeFigureOut">
               <a:rPr lang="vi-VN" smtClean="0"/>
-              <a:t>26/08/2020</a:t>
+              <a:t>18/01/2025</a:t>
             </a:fld>
             <a:endParaRPr lang="vi-VN"/>
           </a:p>
@@ -3111,7 +3127,7 @@
       </p:grpSpPr>
       <p:sp>
         <p:nvSpPr>
-          <p:cNvPr id="2" name="Title 1"/>
+          <p:cNvPr id="4" name="標題 3"/>
           <p:cNvSpPr>
             <a:spLocks noGrp="1"/>
           </p:cNvSpPr>
@@ -3119,154 +3135,184 @@
             <p:ph type="title"/>
           </p:nvPr>
         </p:nvSpPr>
-        <p:spPr/>
-        <p:txBody>
-          <a:bodyPr>
-            <a:normAutofit/>
-          </a:bodyPr>
-          <a:lstStyle/>
-          <a:p>
-            <a:r>
-              <a:rPr lang="zh-CN" altLang="en-US" sz="4800" b="1" dirty="0" smtClean="0">
-                <a:latin typeface="Microsoft JhengHei" panose="020B0604030504040204" pitchFamily="34" charset="-120"/>
-                <a:ea typeface="Microsoft JhengHei" panose="020B0604030504040204" pitchFamily="34" charset="-120"/>
-              </a:rPr>
-              <a:t>穩當的根基</a:t>
-            </a:r>
-            <a:endParaRPr lang="vi-VN" sz="4800" b="1" dirty="0">
-              <a:ea typeface="Microsoft JhengHei" panose="020B0604030504040204" pitchFamily="34" charset="-120"/>
-            </a:endParaRPr>
-          </a:p>
-        </p:txBody>
-      </p:sp>
-      <p:sp>
-        <p:nvSpPr>
-          <p:cNvPr id="3" name="Content Placeholder 2"/>
-          <p:cNvSpPr>
-            <a:spLocks noGrp="1"/>
-          </p:cNvSpPr>
-          <p:nvPr>
-            <p:ph idx="1"/>
-          </p:nvPr>
-        </p:nvSpPr>
-        <p:spPr/>
+        <p:spPr>
+          <a:xfrm>
+            <a:off x="0" y="2660915"/>
+            <a:ext cx="12192000" cy="1143000"/>
+          </a:xfrm>
+        </p:spPr>
         <p:txBody>
           <a:bodyPr>
             <a:noAutofit/>
           </a:bodyPr>
           <a:lstStyle/>
           <a:p>
+            <a:r>
+              <a:rPr lang="zh-CN" altLang="en-US" sz="5333" b="1" u="sng" dirty="0">
+                <a:solidFill>
+                  <a:srgbClr val="000066"/>
+                </a:solidFill>
+                <a:effectLst>
+                  <a:outerShdw blurRad="38100" dist="38100" dir="2700000" algn="tl">
+                    <a:srgbClr val="000000">
+                      <a:alpha val="43137"/>
+                    </a:srgbClr>
+                  </a:outerShdw>
+                </a:effectLst>
+                <a:latin typeface="微軟正黑體" pitchFamily="34" charset="-120"/>
+                <a:ea typeface="微軟正黑體" pitchFamily="34" charset="-120"/>
+              </a:rPr>
+              <a:t>宣道詩 </a:t>
+            </a:r>
+            <a:r>
+              <a:rPr lang="en-US" altLang="zh-CN" sz="5333" b="1" u="sng" dirty="0">
+                <a:solidFill>
+                  <a:srgbClr val="000066"/>
+                </a:solidFill>
+                <a:effectLst>
+                  <a:outerShdw blurRad="38100" dist="38100" dir="2700000" algn="tl">
+                    <a:srgbClr val="000000">
+                      <a:alpha val="43137"/>
+                    </a:srgbClr>
+                  </a:outerShdw>
+                </a:effectLst>
+                <a:latin typeface="微軟正黑體" pitchFamily="34" charset="-120"/>
+                <a:ea typeface="微軟正黑體" pitchFamily="34" charset="-120"/>
+              </a:rPr>
+              <a:t>5</a:t>
+            </a:r>
+            <a:br>
+              <a:rPr lang="en-US" altLang="zh-CN" sz="7200" b="1" i="1" dirty="0">
+                <a:solidFill>
+                  <a:srgbClr val="660033"/>
+                </a:solidFill>
+                <a:effectLst>
+                  <a:outerShdw blurRad="38100" dist="38100" dir="2700000" algn="tl">
+                    <a:srgbClr val="000000">
+                      <a:alpha val="43137"/>
+                    </a:srgbClr>
+                  </a:outerShdw>
+                </a:effectLst>
+                <a:latin typeface="微軟正黑體" pitchFamily="34" charset="-120"/>
+                <a:ea typeface="微軟正黑體" pitchFamily="34" charset="-120"/>
+              </a:rPr>
+            </a:br>
+            <a:r>
+              <a:rPr lang="zh-TW" altLang="en-US" sz="8000" b="1" dirty="0">
+                <a:solidFill>
+                  <a:srgbClr val="660033"/>
+                </a:solidFill>
+                <a:effectLst>
+                  <a:outerShdw blurRad="38100" dist="38100" dir="2700000" algn="tl">
+                    <a:srgbClr val="000000">
+                      <a:alpha val="43137"/>
+                    </a:srgbClr>
+                  </a:outerShdw>
+                </a:effectLst>
+                <a:latin typeface="微軟正黑體" pitchFamily="34" charset="-120"/>
+                <a:ea typeface="微軟正黑體" pitchFamily="34" charset="-120"/>
+              </a:rPr>
+              <a:t>穩當的根基</a:t>
+            </a:r>
+          </a:p>
+        </p:txBody>
+      </p:sp>
+    </p:spTree>
+    <p:extLst>
+      <p:ext uri="{BB962C8B-B14F-4D97-AF65-F5344CB8AC3E}">
+        <p14:creationId xmlns:p14="http://schemas.microsoft.com/office/powerpoint/2010/main" val="3724263107"/>
+      </p:ext>
+    </p:extLst>
+  </p:cSld>
+  <p:clrMapOvr>
+    <a:masterClrMapping/>
+  </p:clrMapOvr>
+</p:sld>
+</file>
+
+<file path=ppt/slides/slide10.xml><?xml version="1.0" encoding="utf-8"?>
+<p:sld xmlns:a="http://schemas.openxmlformats.org/drawingml/2006/main" xmlns:r="http://schemas.openxmlformats.org/officeDocument/2006/relationships" xmlns:p="http://schemas.openxmlformats.org/presentationml/2006/main">
+  <p:cSld>
+    <p:spTree>
+      <p:nvGrpSpPr>
+        <p:cNvPr id="1" name="">
+          <a:extLst>
+            <a:ext uri="{FF2B5EF4-FFF2-40B4-BE49-F238E27FC236}">
+              <a16:creationId xmlns:a16="http://schemas.microsoft.com/office/drawing/2014/main" id="{4D8759B3-1114-C85F-0508-88EE16361562}"/>
+            </a:ext>
+          </a:extLst>
+        </p:cNvPr>
+        <p:cNvGrpSpPr/>
+        <p:nvPr/>
+      </p:nvGrpSpPr>
+      <p:grpSpPr>
+        <a:xfrm>
+          <a:off x="0" y="0"/>
+          <a:ext cx="0" cy="0"/>
+          <a:chOff x="0" y="0"/>
+          <a:chExt cx="0" cy="0"/>
+        </a:xfrm>
+      </p:grpSpPr>
+      <p:sp>
+        <p:nvSpPr>
+          <p:cNvPr id="5" name="內容版面配置區 4">
+            <a:extLst>
+              <a:ext uri="{FF2B5EF4-FFF2-40B4-BE49-F238E27FC236}">
+                <a16:creationId xmlns:a16="http://schemas.microsoft.com/office/drawing/2014/main" id="{E49AC8FF-13AF-DA63-324A-F675D6116DDA}"/>
+              </a:ext>
+            </a:extLst>
+          </p:cNvPr>
+          <p:cNvSpPr>
+            <a:spLocks noGrp="1"/>
+          </p:cNvSpPr>
+          <p:nvPr>
+            <p:ph idx="1"/>
+          </p:nvPr>
+        </p:nvSpPr>
+        <p:spPr>
+          <a:xfrm>
+            <a:off x="0" y="2084853"/>
+            <a:ext cx="12192000" cy="2404863"/>
+          </a:xfrm>
+        </p:spPr>
+        <p:txBody>
+          <a:bodyPr anchor="ctr">
+            <a:normAutofit/>
+          </a:bodyPr>
+          <a:lstStyle/>
+          <a:p>
             <a:pPr marL="0" indent="0" algn="ctr">
               <a:buNone/>
             </a:pPr>
             <a:r>
-              <a:rPr lang="zh-CN" altLang="en-US" sz="5400" b="1" dirty="0" smtClean="0">
-                <a:latin typeface="Microsoft JhengHei" panose="020B0604030504040204" pitchFamily="34" charset="-120"/>
-                <a:ea typeface="Microsoft JhengHei" panose="020B0604030504040204" pitchFamily="34" charset="-120"/>
+              <a:rPr lang="zh-TW" altLang="en-US" sz="6400" b="1" dirty="0">
+                <a:solidFill>
+                  <a:srgbClr val="660033"/>
+                </a:solidFill>
+                <a:latin typeface="Microsoft JhengHei" pitchFamily="34" charset="-120"/>
+                <a:ea typeface="Microsoft JhengHei" pitchFamily="34" charset="-120"/>
               </a:rPr>
-              <a:t>主耶穌眾門徒  有</a:t>
-            </a:r>
-            <a:r>
-              <a:rPr lang="zh-CN" altLang="en-US" sz="5400" b="1" dirty="0">
-                <a:latin typeface="Microsoft JhengHei" panose="020B0604030504040204" pitchFamily="34" charset="-120"/>
-                <a:ea typeface="Microsoft JhengHei" panose="020B0604030504040204" pitchFamily="34" charset="-120"/>
-              </a:rPr>
-              <a:t>穩</a:t>
-            </a:r>
-            <a:r>
-              <a:rPr lang="zh-CN" altLang="en-US" sz="5400" b="1" dirty="0" smtClean="0">
-                <a:latin typeface="Microsoft JhengHei" panose="020B0604030504040204" pitchFamily="34" charset="-120"/>
-                <a:ea typeface="Microsoft JhengHei" panose="020B0604030504040204" pitchFamily="34" charset="-120"/>
-              </a:rPr>
-              <a:t>當根基</a:t>
-            </a:r>
-            <a:endParaRPr lang="en-US" altLang="zh-CN" sz="5400" b="1" dirty="0" smtClean="0">
-              <a:latin typeface="Microsoft JhengHei" panose="020B0604030504040204" pitchFamily="34" charset="-120"/>
-              <a:ea typeface="Microsoft JhengHei" panose="020B0604030504040204" pitchFamily="34" charset="-120"/>
-            </a:endParaRPr>
-          </a:p>
-          <a:p>
-            <a:pPr marL="0" indent="0" algn="ctr">
-              <a:buNone/>
-            </a:pPr>
-            <a:r>
-              <a:rPr lang="zh-CN" altLang="en-US" sz="5400" b="1" dirty="0" smtClean="0">
-                <a:latin typeface="Microsoft JhengHei" panose="020B0604030504040204" pitchFamily="34" charset="-120"/>
-                <a:ea typeface="Microsoft JhengHei" panose="020B0604030504040204" pitchFamily="34" charset="-120"/>
-              </a:rPr>
-              <a:t>即真神的言語  在聖書所記</a:t>
-            </a:r>
-            <a:endParaRPr lang="en-US" altLang="zh-CN" sz="5400" b="1" dirty="0" smtClean="0">
-              <a:latin typeface="Microsoft JhengHei" panose="020B0604030504040204" pitchFamily="34" charset="-120"/>
-              <a:ea typeface="Microsoft JhengHei" panose="020B0604030504040204" pitchFamily="34" charset="-120"/>
-            </a:endParaRPr>
-          </a:p>
-          <a:p>
-            <a:pPr marL="0" indent="0" algn="ctr">
-              <a:buNone/>
-            </a:pPr>
-            <a:r>
-              <a:rPr lang="zh-CN" altLang="en-US" sz="5400" b="1" dirty="0" smtClean="0">
-                <a:latin typeface="Microsoft JhengHei" panose="020B0604030504040204" pitchFamily="34" charset="-120"/>
-                <a:ea typeface="Microsoft JhengHei" panose="020B0604030504040204" pitchFamily="34" charset="-120"/>
-              </a:rPr>
-              <a:t>你既然到主前  要躲避罪惡</a:t>
-            </a:r>
-            <a:endParaRPr lang="en-US" altLang="zh-CN" sz="5400" b="1" dirty="0" smtClean="0">
-              <a:latin typeface="Microsoft JhengHei" panose="020B0604030504040204" pitchFamily="34" charset="-120"/>
-              <a:ea typeface="Microsoft JhengHei" panose="020B0604030504040204" pitchFamily="34" charset="-120"/>
-            </a:endParaRPr>
-          </a:p>
-          <a:p>
-            <a:pPr marL="0" indent="0" algn="ctr">
-              <a:buNone/>
-            </a:pPr>
-            <a:r>
-              <a:rPr lang="zh-CN" altLang="en-US" sz="5400" b="1" dirty="0" smtClean="0">
-                <a:latin typeface="Microsoft JhengHei" panose="020B0604030504040204" pitchFamily="34" charset="-120"/>
-                <a:ea typeface="Microsoft JhengHei" panose="020B0604030504040204" pitchFamily="34" charset="-120"/>
-              </a:rPr>
-              <a:t>所盼望的福氣  實在是穩妥</a:t>
-            </a:r>
-            <a:endParaRPr lang="en-US" altLang="zh-CN" sz="5400" b="1" dirty="0" smtClean="0">
-              <a:latin typeface="Microsoft JhengHei" panose="020B0604030504040204" pitchFamily="34" charset="-120"/>
-              <a:ea typeface="Microsoft JhengHei" panose="020B0604030504040204" pitchFamily="34" charset="-120"/>
-            </a:endParaRPr>
-          </a:p>
-          <a:p>
-            <a:pPr marL="0" indent="0" algn="ctr">
-              <a:buNone/>
-            </a:pPr>
-            <a:r>
-              <a:rPr lang="zh-CN" altLang="en-US" sz="5400" b="1" dirty="0">
-                <a:latin typeface="Microsoft JhengHei" panose="020B0604030504040204" pitchFamily="34" charset="-120"/>
-                <a:ea typeface="Microsoft JhengHei" panose="020B0604030504040204" pitchFamily="34" charset="-120"/>
-              </a:rPr>
-              <a:t>所盼望的福氣  實在是穩</a:t>
-            </a:r>
-            <a:r>
-              <a:rPr lang="zh-CN" altLang="en-US" sz="5400" b="1" dirty="0" smtClean="0">
-                <a:latin typeface="Microsoft JhengHei" panose="020B0604030504040204" pitchFamily="34" charset="-120"/>
-                <a:ea typeface="Microsoft JhengHei" panose="020B0604030504040204" pitchFamily="34" charset="-120"/>
-              </a:rPr>
-              <a:t>妥</a:t>
-            </a:r>
-            <a:endParaRPr lang="vi-VN" sz="5400" b="1" dirty="0">
-              <a:ea typeface="Microsoft JhengHei" panose="020B0604030504040204" pitchFamily="34" charset="-120"/>
-            </a:endParaRPr>
-          </a:p>
-        </p:txBody>
-      </p:sp>
-      <p:sp>
-        <p:nvSpPr>
-          <p:cNvPr id="4" name="TextBox 3"/>
+              <a:t>終叫你成聖潔  而永得平安</a:t>
+            </a:r>
+          </a:p>
+        </p:txBody>
+      </p:sp>
+      <p:sp>
+        <p:nvSpPr>
+          <p:cNvPr id="3" name="TextBox 2">
+            <a:extLst>
+              <a:ext uri="{FF2B5EF4-FFF2-40B4-BE49-F238E27FC236}">
+                <a16:creationId xmlns:a16="http://schemas.microsoft.com/office/drawing/2014/main" id="{D18DAFFE-D269-923C-43A4-DC1D88C5AEDC}"/>
+              </a:ext>
+            </a:extLst>
+          </p:cNvPr>
           <p:cNvSpPr txBox="1"/>
           <p:nvPr/>
         </p:nvSpPr>
         <p:spPr>
           <a:xfrm>
-            <a:off x="445272" y="1741336"/>
-            <a:ext cx="898498" cy="830997"/>
+            <a:off x="0" y="5156201"/>
+            <a:ext cx="12192000" cy="584775"/>
           </a:xfrm>
           <a:prstGeom prst="rect">
             <a:avLst/>
@@ -3279,18 +3325,1242 @@
           </a:bodyPr>
           <a:lstStyle/>
           <a:p>
-            <a:r>
-              <a:rPr lang="en-US" sz="4800" b="1" dirty="0" smtClean="0"/>
-              <a:t>1.</a:t>
-            </a:r>
-            <a:endParaRPr lang="vi-VN" sz="4800" b="1" dirty="0"/>
+            <a:pPr algn="ctr"/>
+            <a:r>
+              <a:rPr lang="en-US" sz="3200" b="1" dirty="0">
+                <a:solidFill>
+                  <a:srgbClr val="660033"/>
+                </a:solidFill>
+              </a:rPr>
+              <a:t>( 3 / 6 )</a:t>
+            </a:r>
+            <a:endParaRPr lang="vi-VN" sz="3200" b="1" dirty="0">
+              <a:solidFill>
+                <a:srgbClr val="660033"/>
+              </a:solidFill>
+            </a:endParaRPr>
           </a:p>
         </p:txBody>
       </p:sp>
     </p:spTree>
     <p:extLst>
       <p:ext uri="{BB962C8B-B14F-4D97-AF65-F5344CB8AC3E}">
-        <p14:creationId xmlns:p14="http://schemas.microsoft.com/office/powerpoint/2010/main" val="2220944777"/>
+        <p14:creationId xmlns:p14="http://schemas.microsoft.com/office/powerpoint/2010/main" val="3551036160"/>
+      </p:ext>
+    </p:extLst>
+  </p:cSld>
+  <p:clrMapOvr>
+    <a:masterClrMapping/>
+  </p:clrMapOvr>
+</p:sld>
+</file>
+
+<file path=ppt/slides/slide11.xml><?xml version="1.0" encoding="utf-8"?>
+<p:sld xmlns:a="http://schemas.openxmlformats.org/drawingml/2006/main" xmlns:r="http://schemas.openxmlformats.org/officeDocument/2006/relationships" xmlns:p="http://schemas.openxmlformats.org/presentationml/2006/main">
+  <p:cSld>
+    <p:spTree>
+      <p:nvGrpSpPr>
+        <p:cNvPr id="1" name="">
+          <a:extLst>
+            <a:ext uri="{FF2B5EF4-FFF2-40B4-BE49-F238E27FC236}">
+              <a16:creationId xmlns:a16="http://schemas.microsoft.com/office/drawing/2014/main" id="{DBE2F122-1229-7156-3C93-69AFFD974721}"/>
+            </a:ext>
+          </a:extLst>
+        </p:cNvPr>
+        <p:cNvGrpSpPr/>
+        <p:nvPr/>
+      </p:nvGrpSpPr>
+      <p:grpSpPr>
+        <a:xfrm>
+          <a:off x="0" y="0"/>
+          <a:ext cx="0" cy="0"/>
+          <a:chOff x="0" y="0"/>
+          <a:chExt cx="0" cy="0"/>
+        </a:xfrm>
+      </p:grpSpPr>
+      <p:sp>
+        <p:nvSpPr>
+          <p:cNvPr id="5" name="內容版面配置區 4">
+            <a:extLst>
+              <a:ext uri="{FF2B5EF4-FFF2-40B4-BE49-F238E27FC236}">
+                <a16:creationId xmlns:a16="http://schemas.microsoft.com/office/drawing/2014/main" id="{095EED77-DDE6-7621-9A41-980389F10E28}"/>
+              </a:ext>
+            </a:extLst>
+          </p:cNvPr>
+          <p:cNvSpPr>
+            <a:spLocks noGrp="1"/>
+          </p:cNvSpPr>
+          <p:nvPr>
+            <p:ph idx="1"/>
+          </p:nvPr>
+        </p:nvSpPr>
+        <p:spPr>
+          <a:xfrm>
+            <a:off x="0" y="2084853"/>
+            <a:ext cx="12192000" cy="2404863"/>
+          </a:xfrm>
+        </p:spPr>
+        <p:txBody>
+          <a:bodyPr anchor="ctr">
+            <a:normAutofit/>
+          </a:bodyPr>
+          <a:lstStyle/>
+          <a:p>
+            <a:pPr marL="0" indent="0" algn="ctr">
+              <a:buNone/>
+            </a:pPr>
+            <a:r>
+              <a:rPr lang="zh-TW" altLang="en-US" sz="6400" b="1" dirty="0">
+                <a:solidFill>
+                  <a:srgbClr val="660033"/>
+                </a:solidFill>
+                <a:latin typeface="Microsoft JhengHei" pitchFamily="34" charset="-120"/>
+                <a:ea typeface="Microsoft JhengHei" pitchFamily="34" charset="-120"/>
+              </a:rPr>
+              <a:t>你雖受大試煉  由火裏經行</a:t>
+            </a:r>
+          </a:p>
+          <a:p>
+            <a:pPr marL="0" indent="0" algn="ctr">
+              <a:buNone/>
+            </a:pPr>
+            <a:r>
+              <a:rPr lang="zh-TW" altLang="en-US" sz="6400" b="1" dirty="0">
+                <a:solidFill>
+                  <a:srgbClr val="660033"/>
+                </a:solidFill>
+                <a:latin typeface="Microsoft JhengHei" pitchFamily="34" charset="-120"/>
+                <a:ea typeface="Microsoft JhengHei" pitchFamily="34" charset="-120"/>
+              </a:rPr>
+              <a:t>我恩典無限量  火焰不能侵</a:t>
+            </a:r>
+          </a:p>
+        </p:txBody>
+      </p:sp>
+      <p:sp>
+        <p:nvSpPr>
+          <p:cNvPr id="3" name="TextBox 2">
+            <a:extLst>
+              <a:ext uri="{FF2B5EF4-FFF2-40B4-BE49-F238E27FC236}">
+                <a16:creationId xmlns:a16="http://schemas.microsoft.com/office/drawing/2014/main" id="{F12BAE1F-E7BF-DD26-CC9F-C4D663868FB1}"/>
+              </a:ext>
+            </a:extLst>
+          </p:cNvPr>
+          <p:cNvSpPr txBox="1"/>
+          <p:nvPr/>
+        </p:nvSpPr>
+        <p:spPr>
+          <a:xfrm>
+            <a:off x="0" y="5156201"/>
+            <a:ext cx="12192000" cy="584775"/>
+          </a:xfrm>
+          <a:prstGeom prst="rect">
+            <a:avLst/>
+          </a:prstGeom>
+          <a:noFill/>
+        </p:spPr>
+        <p:txBody>
+          <a:bodyPr wrap="square" rtlCol="0">
+            <a:spAutoFit/>
+          </a:bodyPr>
+          <a:lstStyle/>
+          <a:p>
+            <a:pPr algn="ctr"/>
+            <a:r>
+              <a:rPr lang="en-US" sz="3200" b="1" dirty="0">
+                <a:solidFill>
+                  <a:srgbClr val="660033"/>
+                </a:solidFill>
+              </a:rPr>
+              <a:t>( 4 / 6 )</a:t>
+            </a:r>
+            <a:endParaRPr lang="vi-VN" sz="3200" b="1" dirty="0">
+              <a:solidFill>
+                <a:srgbClr val="660033"/>
+              </a:solidFill>
+            </a:endParaRPr>
+          </a:p>
+        </p:txBody>
+      </p:sp>
+    </p:spTree>
+    <p:extLst>
+      <p:ext uri="{BB962C8B-B14F-4D97-AF65-F5344CB8AC3E}">
+        <p14:creationId xmlns:p14="http://schemas.microsoft.com/office/powerpoint/2010/main" val="2262507627"/>
+      </p:ext>
+    </p:extLst>
+  </p:cSld>
+  <p:clrMapOvr>
+    <a:masterClrMapping/>
+  </p:clrMapOvr>
+</p:sld>
+</file>
+
+<file path=ppt/slides/slide12.xml><?xml version="1.0" encoding="utf-8"?>
+<p:sld xmlns:a="http://schemas.openxmlformats.org/drawingml/2006/main" xmlns:r="http://schemas.openxmlformats.org/officeDocument/2006/relationships" xmlns:p="http://schemas.openxmlformats.org/presentationml/2006/main">
+  <p:cSld>
+    <p:spTree>
+      <p:nvGrpSpPr>
+        <p:cNvPr id="1" name="">
+          <a:extLst>
+            <a:ext uri="{FF2B5EF4-FFF2-40B4-BE49-F238E27FC236}">
+              <a16:creationId xmlns:a16="http://schemas.microsoft.com/office/drawing/2014/main" id="{217F68A9-0C91-517E-CD42-5BC0CCAB0789}"/>
+            </a:ext>
+          </a:extLst>
+        </p:cNvPr>
+        <p:cNvGrpSpPr/>
+        <p:nvPr/>
+      </p:nvGrpSpPr>
+      <p:grpSpPr>
+        <a:xfrm>
+          <a:off x="0" y="0"/>
+          <a:ext cx="0" cy="0"/>
+          <a:chOff x="0" y="0"/>
+          <a:chExt cx="0" cy="0"/>
+        </a:xfrm>
+      </p:grpSpPr>
+      <p:sp>
+        <p:nvSpPr>
+          <p:cNvPr id="5" name="內容版面配置區 4">
+            <a:extLst>
+              <a:ext uri="{FF2B5EF4-FFF2-40B4-BE49-F238E27FC236}">
+                <a16:creationId xmlns:a16="http://schemas.microsoft.com/office/drawing/2014/main" id="{2F9F0E73-BD3B-6F68-F513-6B75B3006E76}"/>
+              </a:ext>
+            </a:extLst>
+          </p:cNvPr>
+          <p:cNvSpPr>
+            <a:spLocks noGrp="1"/>
+          </p:cNvSpPr>
+          <p:nvPr>
+            <p:ph idx="1"/>
+          </p:nvPr>
+        </p:nvSpPr>
+        <p:spPr>
+          <a:xfrm>
+            <a:off x="0" y="2084853"/>
+            <a:ext cx="12192000" cy="2404863"/>
+          </a:xfrm>
+        </p:spPr>
+        <p:txBody>
+          <a:bodyPr anchor="ctr">
+            <a:normAutofit/>
+          </a:bodyPr>
+          <a:lstStyle/>
+          <a:p>
+            <a:pPr marL="0" indent="0" algn="ctr">
+              <a:buNone/>
+            </a:pPr>
+            <a:r>
+              <a:rPr lang="zh-TW" altLang="en-US" sz="6400" b="1" dirty="0">
+                <a:solidFill>
+                  <a:srgbClr val="660033"/>
+                </a:solidFill>
+                <a:latin typeface="Microsoft JhengHei" pitchFamily="34" charset="-120"/>
+                <a:ea typeface="Microsoft JhengHei" pitchFamily="34" charset="-120"/>
+              </a:rPr>
+              <a:t>你所受的苦楚  是救主好意</a:t>
+            </a:r>
+          </a:p>
+          <a:p>
+            <a:pPr marL="0" indent="0" algn="ctr">
+              <a:buNone/>
+            </a:pPr>
+            <a:r>
+              <a:rPr lang="zh-TW" altLang="en-US" sz="6400" b="1" dirty="0">
+                <a:solidFill>
+                  <a:srgbClr val="660033"/>
+                </a:solidFill>
+                <a:latin typeface="Microsoft JhengHei" pitchFamily="34" charset="-120"/>
+                <a:ea typeface="Microsoft JhengHei" pitchFamily="34" charset="-120"/>
+              </a:rPr>
+              <a:t>像金銀被熬煉  使你成利器</a:t>
+            </a:r>
+          </a:p>
+        </p:txBody>
+      </p:sp>
+      <p:sp>
+        <p:nvSpPr>
+          <p:cNvPr id="3" name="TextBox 2">
+            <a:extLst>
+              <a:ext uri="{FF2B5EF4-FFF2-40B4-BE49-F238E27FC236}">
+                <a16:creationId xmlns:a16="http://schemas.microsoft.com/office/drawing/2014/main" id="{72233472-D3E8-4E81-8FC9-6165919DC550}"/>
+              </a:ext>
+            </a:extLst>
+          </p:cNvPr>
+          <p:cNvSpPr txBox="1"/>
+          <p:nvPr/>
+        </p:nvSpPr>
+        <p:spPr>
+          <a:xfrm>
+            <a:off x="0" y="5156201"/>
+            <a:ext cx="12192000" cy="584775"/>
+          </a:xfrm>
+          <a:prstGeom prst="rect">
+            <a:avLst/>
+          </a:prstGeom>
+          <a:noFill/>
+        </p:spPr>
+        <p:txBody>
+          <a:bodyPr wrap="square" rtlCol="0">
+            <a:spAutoFit/>
+          </a:bodyPr>
+          <a:lstStyle/>
+          <a:p>
+            <a:pPr algn="ctr"/>
+            <a:r>
+              <a:rPr lang="en-US" sz="3200" b="1" dirty="0">
+                <a:solidFill>
+                  <a:srgbClr val="660033"/>
+                </a:solidFill>
+              </a:rPr>
+              <a:t>( 4 / 6 )</a:t>
+            </a:r>
+            <a:endParaRPr lang="vi-VN" sz="3200" b="1" dirty="0">
+              <a:solidFill>
+                <a:srgbClr val="660033"/>
+              </a:solidFill>
+            </a:endParaRPr>
+          </a:p>
+        </p:txBody>
+      </p:sp>
+    </p:spTree>
+    <p:extLst>
+      <p:ext uri="{BB962C8B-B14F-4D97-AF65-F5344CB8AC3E}">
+        <p14:creationId xmlns:p14="http://schemas.microsoft.com/office/powerpoint/2010/main" val="3463939509"/>
+      </p:ext>
+    </p:extLst>
+  </p:cSld>
+  <p:clrMapOvr>
+    <a:masterClrMapping/>
+  </p:clrMapOvr>
+</p:sld>
+</file>
+
+<file path=ppt/slides/slide13.xml><?xml version="1.0" encoding="utf-8"?>
+<p:sld xmlns:a="http://schemas.openxmlformats.org/drawingml/2006/main" xmlns:r="http://schemas.openxmlformats.org/officeDocument/2006/relationships" xmlns:p="http://schemas.openxmlformats.org/presentationml/2006/main">
+  <p:cSld>
+    <p:spTree>
+      <p:nvGrpSpPr>
+        <p:cNvPr id="1" name="">
+          <a:extLst>
+            <a:ext uri="{FF2B5EF4-FFF2-40B4-BE49-F238E27FC236}">
+              <a16:creationId xmlns:a16="http://schemas.microsoft.com/office/drawing/2014/main" id="{D95C1774-5FC0-F83E-839F-1396C8C862DF}"/>
+            </a:ext>
+          </a:extLst>
+        </p:cNvPr>
+        <p:cNvGrpSpPr/>
+        <p:nvPr/>
+      </p:nvGrpSpPr>
+      <p:grpSpPr>
+        <a:xfrm>
+          <a:off x="0" y="0"/>
+          <a:ext cx="0" cy="0"/>
+          <a:chOff x="0" y="0"/>
+          <a:chExt cx="0" cy="0"/>
+        </a:xfrm>
+      </p:grpSpPr>
+      <p:sp>
+        <p:nvSpPr>
+          <p:cNvPr id="5" name="內容版面配置區 4">
+            <a:extLst>
+              <a:ext uri="{FF2B5EF4-FFF2-40B4-BE49-F238E27FC236}">
+                <a16:creationId xmlns:a16="http://schemas.microsoft.com/office/drawing/2014/main" id="{F7E5F5F5-E8FF-7C07-A320-C09EBDD6CC8E}"/>
+              </a:ext>
+            </a:extLst>
+          </p:cNvPr>
+          <p:cNvSpPr>
+            <a:spLocks noGrp="1"/>
+          </p:cNvSpPr>
+          <p:nvPr>
+            <p:ph idx="1"/>
+          </p:nvPr>
+        </p:nvSpPr>
+        <p:spPr>
+          <a:xfrm>
+            <a:off x="0" y="2084853"/>
+            <a:ext cx="12192000" cy="2404863"/>
+          </a:xfrm>
+        </p:spPr>
+        <p:txBody>
+          <a:bodyPr anchor="ctr">
+            <a:normAutofit/>
+          </a:bodyPr>
+          <a:lstStyle/>
+          <a:p>
+            <a:pPr marL="0" indent="0" algn="ctr">
+              <a:buNone/>
+            </a:pPr>
+            <a:r>
+              <a:rPr lang="zh-TW" altLang="en-US" sz="6400" b="1" dirty="0">
+                <a:solidFill>
+                  <a:srgbClr val="660033"/>
+                </a:solidFill>
+                <a:latin typeface="Microsoft JhengHei" pitchFamily="34" charset="-120"/>
+                <a:ea typeface="Microsoft JhengHei" pitchFamily="34" charset="-120"/>
+              </a:rPr>
+              <a:t>像金銀被熬煉  使你成利器</a:t>
+            </a:r>
+          </a:p>
+        </p:txBody>
+      </p:sp>
+      <p:sp>
+        <p:nvSpPr>
+          <p:cNvPr id="3" name="TextBox 2">
+            <a:extLst>
+              <a:ext uri="{FF2B5EF4-FFF2-40B4-BE49-F238E27FC236}">
+                <a16:creationId xmlns:a16="http://schemas.microsoft.com/office/drawing/2014/main" id="{0D0A98B9-3DFB-88B8-BA29-AB092C70BF02}"/>
+              </a:ext>
+            </a:extLst>
+          </p:cNvPr>
+          <p:cNvSpPr txBox="1"/>
+          <p:nvPr/>
+        </p:nvSpPr>
+        <p:spPr>
+          <a:xfrm>
+            <a:off x="0" y="5156201"/>
+            <a:ext cx="12192000" cy="584775"/>
+          </a:xfrm>
+          <a:prstGeom prst="rect">
+            <a:avLst/>
+          </a:prstGeom>
+          <a:noFill/>
+        </p:spPr>
+        <p:txBody>
+          <a:bodyPr wrap="square" rtlCol="0">
+            <a:spAutoFit/>
+          </a:bodyPr>
+          <a:lstStyle/>
+          <a:p>
+            <a:pPr algn="ctr"/>
+            <a:r>
+              <a:rPr lang="en-US" sz="3200" b="1" dirty="0">
+                <a:solidFill>
+                  <a:srgbClr val="660033"/>
+                </a:solidFill>
+              </a:rPr>
+              <a:t>( 4 / 6 )</a:t>
+            </a:r>
+            <a:endParaRPr lang="vi-VN" sz="3200" b="1" dirty="0">
+              <a:solidFill>
+                <a:srgbClr val="660033"/>
+              </a:solidFill>
+            </a:endParaRPr>
+          </a:p>
+        </p:txBody>
+      </p:sp>
+    </p:spTree>
+    <p:extLst>
+      <p:ext uri="{BB962C8B-B14F-4D97-AF65-F5344CB8AC3E}">
+        <p14:creationId xmlns:p14="http://schemas.microsoft.com/office/powerpoint/2010/main" val="539569183"/>
+      </p:ext>
+    </p:extLst>
+  </p:cSld>
+  <p:clrMapOvr>
+    <a:masterClrMapping/>
+  </p:clrMapOvr>
+</p:sld>
+</file>
+
+<file path=ppt/slides/slide14.xml><?xml version="1.0" encoding="utf-8"?>
+<p:sld xmlns:a="http://schemas.openxmlformats.org/drawingml/2006/main" xmlns:r="http://schemas.openxmlformats.org/officeDocument/2006/relationships" xmlns:p="http://schemas.openxmlformats.org/presentationml/2006/main">
+  <p:cSld>
+    <p:spTree>
+      <p:nvGrpSpPr>
+        <p:cNvPr id="1" name="">
+          <a:extLst>
+            <a:ext uri="{FF2B5EF4-FFF2-40B4-BE49-F238E27FC236}">
+              <a16:creationId xmlns:a16="http://schemas.microsoft.com/office/drawing/2014/main" id="{2F5918AE-65E7-7ECA-F5A5-1F4A6EDBC182}"/>
+            </a:ext>
+          </a:extLst>
+        </p:cNvPr>
+        <p:cNvGrpSpPr/>
+        <p:nvPr/>
+      </p:nvGrpSpPr>
+      <p:grpSpPr>
+        <a:xfrm>
+          <a:off x="0" y="0"/>
+          <a:ext cx="0" cy="0"/>
+          <a:chOff x="0" y="0"/>
+          <a:chExt cx="0" cy="0"/>
+        </a:xfrm>
+      </p:grpSpPr>
+      <p:sp>
+        <p:nvSpPr>
+          <p:cNvPr id="5" name="內容版面配置區 4">
+            <a:extLst>
+              <a:ext uri="{FF2B5EF4-FFF2-40B4-BE49-F238E27FC236}">
+                <a16:creationId xmlns:a16="http://schemas.microsoft.com/office/drawing/2014/main" id="{BE5A1E23-4DCE-FD42-F270-0B704ACBA395}"/>
+              </a:ext>
+            </a:extLst>
+          </p:cNvPr>
+          <p:cNvSpPr>
+            <a:spLocks noGrp="1"/>
+          </p:cNvSpPr>
+          <p:nvPr>
+            <p:ph idx="1"/>
+          </p:nvPr>
+        </p:nvSpPr>
+        <p:spPr>
+          <a:xfrm>
+            <a:off x="0" y="2084853"/>
+            <a:ext cx="12192000" cy="2404863"/>
+          </a:xfrm>
+        </p:spPr>
+        <p:txBody>
+          <a:bodyPr anchor="ctr">
+            <a:normAutofit/>
+          </a:bodyPr>
+          <a:lstStyle/>
+          <a:p>
+            <a:pPr marL="0" indent="0" algn="ctr">
+              <a:buNone/>
+            </a:pPr>
+            <a:r>
+              <a:rPr lang="zh-TW" altLang="en-US" sz="6400" b="1" dirty="0">
+                <a:solidFill>
+                  <a:srgbClr val="660033"/>
+                </a:solidFill>
+                <a:latin typeface="Microsoft JhengHei" pitchFamily="34" charset="-120"/>
+                <a:ea typeface="Microsoft JhengHei" pitchFamily="34" charset="-120"/>
+              </a:rPr>
+              <a:t>自幼時到年老  我保護甚密</a:t>
+            </a:r>
+          </a:p>
+          <a:p>
+            <a:pPr marL="0" indent="0" algn="ctr">
+              <a:buNone/>
+            </a:pPr>
+            <a:r>
+              <a:rPr lang="zh-TW" altLang="en-US" sz="6400" b="1" dirty="0">
+                <a:solidFill>
+                  <a:srgbClr val="660033"/>
+                </a:solidFill>
+                <a:latin typeface="Microsoft JhengHei" pitchFamily="34" charset="-120"/>
+                <a:ea typeface="Microsoft JhengHei" pitchFamily="34" charset="-120"/>
+              </a:rPr>
+              <a:t>該知道我愛你  是永遠不息</a:t>
+            </a:r>
+          </a:p>
+        </p:txBody>
+      </p:sp>
+      <p:sp>
+        <p:nvSpPr>
+          <p:cNvPr id="3" name="TextBox 2">
+            <a:extLst>
+              <a:ext uri="{FF2B5EF4-FFF2-40B4-BE49-F238E27FC236}">
+                <a16:creationId xmlns:a16="http://schemas.microsoft.com/office/drawing/2014/main" id="{4199CFD8-35CB-74F0-0F7B-B4E75EDA9051}"/>
+              </a:ext>
+            </a:extLst>
+          </p:cNvPr>
+          <p:cNvSpPr txBox="1"/>
+          <p:nvPr/>
+        </p:nvSpPr>
+        <p:spPr>
+          <a:xfrm>
+            <a:off x="0" y="5156201"/>
+            <a:ext cx="12192000" cy="584775"/>
+          </a:xfrm>
+          <a:prstGeom prst="rect">
+            <a:avLst/>
+          </a:prstGeom>
+          <a:noFill/>
+        </p:spPr>
+        <p:txBody>
+          <a:bodyPr wrap="square" rtlCol="0">
+            <a:spAutoFit/>
+          </a:bodyPr>
+          <a:lstStyle/>
+          <a:p>
+            <a:pPr algn="ctr"/>
+            <a:r>
+              <a:rPr lang="en-US" sz="3200" b="1" dirty="0">
+                <a:solidFill>
+                  <a:srgbClr val="660033"/>
+                </a:solidFill>
+              </a:rPr>
+              <a:t>( 5 / 6 )</a:t>
+            </a:r>
+            <a:endParaRPr lang="vi-VN" sz="3200" b="1" dirty="0">
+              <a:solidFill>
+                <a:srgbClr val="660033"/>
+              </a:solidFill>
+            </a:endParaRPr>
+          </a:p>
+        </p:txBody>
+      </p:sp>
+    </p:spTree>
+    <p:extLst>
+      <p:ext uri="{BB962C8B-B14F-4D97-AF65-F5344CB8AC3E}">
+        <p14:creationId xmlns:p14="http://schemas.microsoft.com/office/powerpoint/2010/main" val="572050474"/>
+      </p:ext>
+    </p:extLst>
+  </p:cSld>
+  <p:clrMapOvr>
+    <a:masterClrMapping/>
+  </p:clrMapOvr>
+</p:sld>
+</file>
+
+<file path=ppt/slides/slide15.xml><?xml version="1.0" encoding="utf-8"?>
+<p:sld xmlns:a="http://schemas.openxmlformats.org/drawingml/2006/main" xmlns:r="http://schemas.openxmlformats.org/officeDocument/2006/relationships" xmlns:p="http://schemas.openxmlformats.org/presentationml/2006/main">
+  <p:cSld>
+    <p:spTree>
+      <p:nvGrpSpPr>
+        <p:cNvPr id="1" name="">
+          <a:extLst>
+            <a:ext uri="{FF2B5EF4-FFF2-40B4-BE49-F238E27FC236}">
+              <a16:creationId xmlns:a16="http://schemas.microsoft.com/office/drawing/2014/main" id="{146416CA-3C21-C05E-2A20-4445C4D50483}"/>
+            </a:ext>
+          </a:extLst>
+        </p:cNvPr>
+        <p:cNvGrpSpPr/>
+        <p:nvPr/>
+      </p:nvGrpSpPr>
+      <p:grpSpPr>
+        <a:xfrm>
+          <a:off x="0" y="0"/>
+          <a:ext cx="0" cy="0"/>
+          <a:chOff x="0" y="0"/>
+          <a:chExt cx="0" cy="0"/>
+        </a:xfrm>
+      </p:grpSpPr>
+      <p:sp>
+        <p:nvSpPr>
+          <p:cNvPr id="5" name="內容版面配置區 4">
+            <a:extLst>
+              <a:ext uri="{FF2B5EF4-FFF2-40B4-BE49-F238E27FC236}">
+                <a16:creationId xmlns:a16="http://schemas.microsoft.com/office/drawing/2014/main" id="{B677DAA0-7C9B-5613-BD11-BA2C275F969A}"/>
+              </a:ext>
+            </a:extLst>
+          </p:cNvPr>
+          <p:cNvSpPr>
+            <a:spLocks noGrp="1"/>
+          </p:cNvSpPr>
+          <p:nvPr>
+            <p:ph idx="1"/>
+          </p:nvPr>
+        </p:nvSpPr>
+        <p:spPr>
+          <a:xfrm>
+            <a:off x="0" y="2084853"/>
+            <a:ext cx="12192000" cy="2404863"/>
+          </a:xfrm>
+        </p:spPr>
+        <p:txBody>
+          <a:bodyPr anchor="ctr">
+            <a:normAutofit/>
+          </a:bodyPr>
+          <a:lstStyle/>
+          <a:p>
+            <a:pPr marL="0" indent="0" algn="ctr">
+              <a:buNone/>
+            </a:pPr>
+            <a:r>
+              <a:rPr lang="zh-TW" altLang="en-US" sz="6400" b="1" dirty="0">
+                <a:solidFill>
+                  <a:srgbClr val="660033"/>
+                </a:solidFill>
+                <a:latin typeface="Microsoft JhengHei" pitchFamily="34" charset="-120"/>
+                <a:ea typeface="Microsoft JhengHei" pitchFamily="34" charset="-120"/>
+              </a:rPr>
+              <a:t>直到頭髮白了  你力量衰弱</a:t>
+            </a:r>
+          </a:p>
+          <a:p>
+            <a:pPr marL="0" indent="0" algn="ctr">
+              <a:buNone/>
+            </a:pPr>
+            <a:r>
+              <a:rPr lang="zh-TW" altLang="en-US" sz="6400" b="1" dirty="0">
+                <a:solidFill>
+                  <a:srgbClr val="660033"/>
+                </a:solidFill>
+                <a:latin typeface="Microsoft JhengHei" pitchFamily="34" charset="-120"/>
+                <a:ea typeface="Microsoft JhengHei" pitchFamily="34" charset="-120"/>
+              </a:rPr>
+              <a:t>我仍然疼愛你  在懷裏抱着</a:t>
+            </a:r>
+          </a:p>
+        </p:txBody>
+      </p:sp>
+      <p:sp>
+        <p:nvSpPr>
+          <p:cNvPr id="3" name="TextBox 2">
+            <a:extLst>
+              <a:ext uri="{FF2B5EF4-FFF2-40B4-BE49-F238E27FC236}">
+                <a16:creationId xmlns:a16="http://schemas.microsoft.com/office/drawing/2014/main" id="{CAACE730-676E-05AD-C91B-F23E6ECEE132}"/>
+              </a:ext>
+            </a:extLst>
+          </p:cNvPr>
+          <p:cNvSpPr txBox="1"/>
+          <p:nvPr/>
+        </p:nvSpPr>
+        <p:spPr>
+          <a:xfrm>
+            <a:off x="0" y="5156201"/>
+            <a:ext cx="12192000" cy="584775"/>
+          </a:xfrm>
+          <a:prstGeom prst="rect">
+            <a:avLst/>
+          </a:prstGeom>
+          <a:noFill/>
+        </p:spPr>
+        <p:txBody>
+          <a:bodyPr wrap="square" rtlCol="0">
+            <a:spAutoFit/>
+          </a:bodyPr>
+          <a:lstStyle/>
+          <a:p>
+            <a:pPr algn="ctr"/>
+            <a:r>
+              <a:rPr lang="en-US" sz="3200" b="1" dirty="0">
+                <a:solidFill>
+                  <a:srgbClr val="660033"/>
+                </a:solidFill>
+              </a:rPr>
+              <a:t>( 5 / 6 )</a:t>
+            </a:r>
+            <a:endParaRPr lang="vi-VN" sz="3200" b="1" dirty="0">
+              <a:solidFill>
+                <a:srgbClr val="660033"/>
+              </a:solidFill>
+            </a:endParaRPr>
+          </a:p>
+        </p:txBody>
+      </p:sp>
+    </p:spTree>
+    <p:extLst>
+      <p:ext uri="{BB962C8B-B14F-4D97-AF65-F5344CB8AC3E}">
+        <p14:creationId xmlns:p14="http://schemas.microsoft.com/office/powerpoint/2010/main" val="2721358982"/>
+      </p:ext>
+    </p:extLst>
+  </p:cSld>
+  <p:clrMapOvr>
+    <a:masterClrMapping/>
+  </p:clrMapOvr>
+</p:sld>
+</file>
+
+<file path=ppt/slides/slide16.xml><?xml version="1.0" encoding="utf-8"?>
+<p:sld xmlns:a="http://schemas.openxmlformats.org/drawingml/2006/main" xmlns:r="http://schemas.openxmlformats.org/officeDocument/2006/relationships" xmlns:p="http://schemas.openxmlformats.org/presentationml/2006/main">
+  <p:cSld>
+    <p:spTree>
+      <p:nvGrpSpPr>
+        <p:cNvPr id="1" name="">
+          <a:extLst>
+            <a:ext uri="{FF2B5EF4-FFF2-40B4-BE49-F238E27FC236}">
+              <a16:creationId xmlns:a16="http://schemas.microsoft.com/office/drawing/2014/main" id="{038876B6-3DD7-D966-C59C-F8796B4D69F1}"/>
+            </a:ext>
+          </a:extLst>
+        </p:cNvPr>
+        <p:cNvGrpSpPr/>
+        <p:nvPr/>
+      </p:nvGrpSpPr>
+      <p:grpSpPr>
+        <a:xfrm>
+          <a:off x="0" y="0"/>
+          <a:ext cx="0" cy="0"/>
+          <a:chOff x="0" y="0"/>
+          <a:chExt cx="0" cy="0"/>
+        </a:xfrm>
+      </p:grpSpPr>
+      <p:sp>
+        <p:nvSpPr>
+          <p:cNvPr id="5" name="內容版面配置區 4">
+            <a:extLst>
+              <a:ext uri="{FF2B5EF4-FFF2-40B4-BE49-F238E27FC236}">
+                <a16:creationId xmlns:a16="http://schemas.microsoft.com/office/drawing/2014/main" id="{25432787-377E-A4AC-3BC9-1957C974731B}"/>
+              </a:ext>
+            </a:extLst>
+          </p:cNvPr>
+          <p:cNvSpPr>
+            <a:spLocks noGrp="1"/>
+          </p:cNvSpPr>
+          <p:nvPr>
+            <p:ph idx="1"/>
+          </p:nvPr>
+        </p:nvSpPr>
+        <p:spPr>
+          <a:xfrm>
+            <a:off x="0" y="2084853"/>
+            <a:ext cx="12192000" cy="2404863"/>
+          </a:xfrm>
+        </p:spPr>
+        <p:txBody>
+          <a:bodyPr anchor="ctr">
+            <a:normAutofit/>
+          </a:bodyPr>
+          <a:lstStyle/>
+          <a:p>
+            <a:pPr marL="0" indent="0" algn="ctr">
+              <a:buNone/>
+            </a:pPr>
+            <a:r>
+              <a:rPr lang="zh-TW" altLang="en-US" sz="6400" b="1" dirty="0">
+                <a:solidFill>
+                  <a:srgbClr val="660033"/>
+                </a:solidFill>
+                <a:latin typeface="Microsoft JhengHei" pitchFamily="34" charset="-120"/>
+                <a:ea typeface="Microsoft JhengHei" pitchFamily="34" charset="-120"/>
+              </a:rPr>
+              <a:t>我仍然疼愛你  在懷裏抱着</a:t>
+            </a:r>
+          </a:p>
+        </p:txBody>
+      </p:sp>
+      <p:sp>
+        <p:nvSpPr>
+          <p:cNvPr id="3" name="TextBox 2">
+            <a:extLst>
+              <a:ext uri="{FF2B5EF4-FFF2-40B4-BE49-F238E27FC236}">
+                <a16:creationId xmlns:a16="http://schemas.microsoft.com/office/drawing/2014/main" id="{352E91D0-5EF1-A27C-70CB-8532DDB937DC}"/>
+              </a:ext>
+            </a:extLst>
+          </p:cNvPr>
+          <p:cNvSpPr txBox="1"/>
+          <p:nvPr/>
+        </p:nvSpPr>
+        <p:spPr>
+          <a:xfrm>
+            <a:off x="0" y="5156201"/>
+            <a:ext cx="12192000" cy="584775"/>
+          </a:xfrm>
+          <a:prstGeom prst="rect">
+            <a:avLst/>
+          </a:prstGeom>
+          <a:noFill/>
+        </p:spPr>
+        <p:txBody>
+          <a:bodyPr wrap="square" rtlCol="0">
+            <a:spAutoFit/>
+          </a:bodyPr>
+          <a:lstStyle/>
+          <a:p>
+            <a:pPr algn="ctr"/>
+            <a:r>
+              <a:rPr lang="en-US" sz="3200" b="1" dirty="0">
+                <a:solidFill>
+                  <a:srgbClr val="660033"/>
+                </a:solidFill>
+              </a:rPr>
+              <a:t>( 5 / 6 )</a:t>
+            </a:r>
+            <a:endParaRPr lang="vi-VN" sz="3200" b="1" dirty="0">
+              <a:solidFill>
+                <a:srgbClr val="660033"/>
+              </a:solidFill>
+            </a:endParaRPr>
+          </a:p>
+        </p:txBody>
+      </p:sp>
+    </p:spTree>
+    <p:extLst>
+      <p:ext uri="{BB962C8B-B14F-4D97-AF65-F5344CB8AC3E}">
+        <p14:creationId xmlns:p14="http://schemas.microsoft.com/office/powerpoint/2010/main" val="2306968896"/>
+      </p:ext>
+    </p:extLst>
+  </p:cSld>
+  <p:clrMapOvr>
+    <a:masterClrMapping/>
+  </p:clrMapOvr>
+</p:sld>
+</file>
+
+<file path=ppt/slides/slide17.xml><?xml version="1.0" encoding="utf-8"?>
+<p:sld xmlns:a="http://schemas.openxmlformats.org/drawingml/2006/main" xmlns:r="http://schemas.openxmlformats.org/officeDocument/2006/relationships" xmlns:p="http://schemas.openxmlformats.org/presentationml/2006/main">
+  <p:cSld>
+    <p:spTree>
+      <p:nvGrpSpPr>
+        <p:cNvPr id="1" name="">
+          <a:extLst>
+            <a:ext uri="{FF2B5EF4-FFF2-40B4-BE49-F238E27FC236}">
+              <a16:creationId xmlns:a16="http://schemas.microsoft.com/office/drawing/2014/main" id="{13808FFF-0575-90E9-B980-236636BB977E}"/>
+            </a:ext>
+          </a:extLst>
+        </p:cNvPr>
+        <p:cNvGrpSpPr/>
+        <p:nvPr/>
+      </p:nvGrpSpPr>
+      <p:grpSpPr>
+        <a:xfrm>
+          <a:off x="0" y="0"/>
+          <a:ext cx="0" cy="0"/>
+          <a:chOff x="0" y="0"/>
+          <a:chExt cx="0" cy="0"/>
+        </a:xfrm>
+      </p:grpSpPr>
+      <p:sp>
+        <p:nvSpPr>
+          <p:cNvPr id="5" name="內容版面配置區 4">
+            <a:extLst>
+              <a:ext uri="{FF2B5EF4-FFF2-40B4-BE49-F238E27FC236}">
+                <a16:creationId xmlns:a16="http://schemas.microsoft.com/office/drawing/2014/main" id="{73A6EAD0-021F-9B15-CB9B-5544E439E405}"/>
+              </a:ext>
+            </a:extLst>
+          </p:cNvPr>
+          <p:cNvSpPr>
+            <a:spLocks noGrp="1"/>
+          </p:cNvSpPr>
+          <p:nvPr>
+            <p:ph idx="1"/>
+          </p:nvPr>
+        </p:nvSpPr>
+        <p:spPr>
+          <a:xfrm>
+            <a:off x="0" y="2084853"/>
+            <a:ext cx="12192000" cy="2404863"/>
+          </a:xfrm>
+        </p:spPr>
+        <p:txBody>
+          <a:bodyPr anchor="ctr">
+            <a:normAutofit/>
+          </a:bodyPr>
+          <a:lstStyle/>
+          <a:p>
+            <a:pPr marL="0" indent="0" algn="ctr">
+              <a:buNone/>
+            </a:pPr>
+            <a:r>
+              <a:rPr lang="zh-TW" altLang="en-US" sz="6400" b="1" dirty="0">
+                <a:solidFill>
+                  <a:srgbClr val="660033"/>
+                </a:solidFill>
+                <a:latin typeface="Microsoft JhengHei" pitchFamily="34" charset="-120"/>
+                <a:ea typeface="Microsoft JhengHei" pitchFamily="34" charset="-120"/>
+              </a:rPr>
+              <a:t>凡倚靠主耶穌  望靈魂得救</a:t>
+            </a:r>
+          </a:p>
+          <a:p>
+            <a:pPr marL="0" indent="0" algn="ctr">
+              <a:buNone/>
+            </a:pPr>
+            <a:r>
+              <a:rPr lang="zh-TW" altLang="en-US" sz="6400" b="1" dirty="0">
+                <a:solidFill>
+                  <a:srgbClr val="660033"/>
+                </a:solidFill>
+                <a:latin typeface="Microsoft JhengHei" pitchFamily="34" charset="-120"/>
+                <a:ea typeface="Microsoft JhengHei" pitchFamily="34" charset="-120"/>
+              </a:rPr>
+              <a:t>主萬不肯丟他  在仇敵惡手</a:t>
+            </a:r>
+          </a:p>
+        </p:txBody>
+      </p:sp>
+      <p:sp>
+        <p:nvSpPr>
+          <p:cNvPr id="3" name="TextBox 2">
+            <a:extLst>
+              <a:ext uri="{FF2B5EF4-FFF2-40B4-BE49-F238E27FC236}">
+                <a16:creationId xmlns:a16="http://schemas.microsoft.com/office/drawing/2014/main" id="{65DE42FE-FBE7-4DEE-306B-DBA31ADAD8F2}"/>
+              </a:ext>
+            </a:extLst>
+          </p:cNvPr>
+          <p:cNvSpPr txBox="1"/>
+          <p:nvPr/>
+        </p:nvSpPr>
+        <p:spPr>
+          <a:xfrm>
+            <a:off x="0" y="5156201"/>
+            <a:ext cx="12192000" cy="584775"/>
+          </a:xfrm>
+          <a:prstGeom prst="rect">
+            <a:avLst/>
+          </a:prstGeom>
+          <a:noFill/>
+        </p:spPr>
+        <p:txBody>
+          <a:bodyPr wrap="square" rtlCol="0">
+            <a:spAutoFit/>
+          </a:bodyPr>
+          <a:lstStyle/>
+          <a:p>
+            <a:pPr algn="ctr"/>
+            <a:r>
+              <a:rPr lang="en-US" sz="3200" b="1" dirty="0">
+                <a:solidFill>
+                  <a:srgbClr val="660033"/>
+                </a:solidFill>
+              </a:rPr>
+              <a:t>( 6 / 6 )</a:t>
+            </a:r>
+            <a:endParaRPr lang="vi-VN" sz="3200" b="1" dirty="0">
+              <a:solidFill>
+                <a:srgbClr val="660033"/>
+              </a:solidFill>
+            </a:endParaRPr>
+          </a:p>
+        </p:txBody>
+      </p:sp>
+    </p:spTree>
+    <p:extLst>
+      <p:ext uri="{BB962C8B-B14F-4D97-AF65-F5344CB8AC3E}">
+        <p14:creationId xmlns:p14="http://schemas.microsoft.com/office/powerpoint/2010/main" val="3818388997"/>
+      </p:ext>
+    </p:extLst>
+  </p:cSld>
+  <p:clrMapOvr>
+    <a:masterClrMapping/>
+  </p:clrMapOvr>
+</p:sld>
+</file>
+
+<file path=ppt/slides/slide18.xml><?xml version="1.0" encoding="utf-8"?>
+<p:sld xmlns:a="http://schemas.openxmlformats.org/drawingml/2006/main" xmlns:r="http://schemas.openxmlformats.org/officeDocument/2006/relationships" xmlns:p="http://schemas.openxmlformats.org/presentationml/2006/main">
+  <p:cSld>
+    <p:spTree>
+      <p:nvGrpSpPr>
+        <p:cNvPr id="1" name="">
+          <a:extLst>
+            <a:ext uri="{FF2B5EF4-FFF2-40B4-BE49-F238E27FC236}">
+              <a16:creationId xmlns:a16="http://schemas.microsoft.com/office/drawing/2014/main" id="{5A03DD1C-8878-E1E4-B9E6-DA93BDCFD02E}"/>
+            </a:ext>
+          </a:extLst>
+        </p:cNvPr>
+        <p:cNvGrpSpPr/>
+        <p:nvPr/>
+      </p:nvGrpSpPr>
+      <p:grpSpPr>
+        <a:xfrm>
+          <a:off x="0" y="0"/>
+          <a:ext cx="0" cy="0"/>
+          <a:chOff x="0" y="0"/>
+          <a:chExt cx="0" cy="0"/>
+        </a:xfrm>
+      </p:grpSpPr>
+      <p:sp>
+        <p:nvSpPr>
+          <p:cNvPr id="5" name="內容版面配置區 4">
+            <a:extLst>
+              <a:ext uri="{FF2B5EF4-FFF2-40B4-BE49-F238E27FC236}">
+                <a16:creationId xmlns:a16="http://schemas.microsoft.com/office/drawing/2014/main" id="{F6203629-300A-BC71-00DD-D869BE8A1087}"/>
+              </a:ext>
+            </a:extLst>
+          </p:cNvPr>
+          <p:cNvSpPr>
+            <a:spLocks noGrp="1"/>
+          </p:cNvSpPr>
+          <p:nvPr>
+            <p:ph idx="1"/>
+          </p:nvPr>
+        </p:nvSpPr>
+        <p:spPr>
+          <a:xfrm>
+            <a:off x="0" y="2084853"/>
+            <a:ext cx="12192000" cy="2404863"/>
+          </a:xfrm>
+        </p:spPr>
+        <p:txBody>
+          <a:bodyPr anchor="ctr">
+            <a:normAutofit/>
+          </a:bodyPr>
+          <a:lstStyle/>
+          <a:p>
+            <a:pPr marL="0" indent="0" algn="ctr">
+              <a:buNone/>
+            </a:pPr>
+            <a:r>
+              <a:rPr lang="zh-TW" altLang="en-US" sz="6400" b="1" dirty="0">
+                <a:solidFill>
+                  <a:srgbClr val="660033"/>
+                </a:solidFill>
+                <a:latin typeface="Microsoft JhengHei" pitchFamily="34" charset="-120"/>
+                <a:ea typeface="Microsoft JhengHei" pitchFamily="34" charset="-120"/>
+              </a:rPr>
+              <a:t>雖四面有邪惡  用計謀來攻</a:t>
+            </a:r>
+          </a:p>
+          <a:p>
+            <a:pPr marL="0" indent="0" algn="ctr">
+              <a:buNone/>
+            </a:pPr>
+            <a:r>
+              <a:rPr lang="zh-TW" altLang="en-US" sz="6400" b="1" dirty="0">
+                <a:solidFill>
+                  <a:srgbClr val="660033"/>
+                </a:solidFill>
+                <a:latin typeface="Microsoft JhengHei" pitchFamily="34" charset="-120"/>
+                <a:ea typeface="Microsoft JhengHei" pitchFamily="34" charset="-120"/>
+              </a:rPr>
+              <a:t>主永遠不離他  到世世無窮</a:t>
+            </a:r>
+          </a:p>
+        </p:txBody>
+      </p:sp>
+      <p:sp>
+        <p:nvSpPr>
+          <p:cNvPr id="3" name="TextBox 2">
+            <a:extLst>
+              <a:ext uri="{FF2B5EF4-FFF2-40B4-BE49-F238E27FC236}">
+                <a16:creationId xmlns:a16="http://schemas.microsoft.com/office/drawing/2014/main" id="{6151F996-CFF2-2BA9-9BCC-4A7D81BB29E7}"/>
+              </a:ext>
+            </a:extLst>
+          </p:cNvPr>
+          <p:cNvSpPr txBox="1"/>
+          <p:nvPr/>
+        </p:nvSpPr>
+        <p:spPr>
+          <a:xfrm>
+            <a:off x="0" y="5156201"/>
+            <a:ext cx="12192000" cy="584775"/>
+          </a:xfrm>
+          <a:prstGeom prst="rect">
+            <a:avLst/>
+          </a:prstGeom>
+          <a:noFill/>
+        </p:spPr>
+        <p:txBody>
+          <a:bodyPr wrap="square" rtlCol="0">
+            <a:spAutoFit/>
+          </a:bodyPr>
+          <a:lstStyle/>
+          <a:p>
+            <a:pPr algn="ctr"/>
+            <a:r>
+              <a:rPr lang="en-US" sz="3200" b="1" dirty="0">
+                <a:solidFill>
+                  <a:srgbClr val="660033"/>
+                </a:solidFill>
+              </a:rPr>
+              <a:t>( 6 / 6 )</a:t>
+            </a:r>
+            <a:endParaRPr lang="vi-VN" sz="3200" b="1" dirty="0">
+              <a:solidFill>
+                <a:srgbClr val="660033"/>
+              </a:solidFill>
+            </a:endParaRPr>
+          </a:p>
+        </p:txBody>
+      </p:sp>
+    </p:spTree>
+    <p:extLst>
+      <p:ext uri="{BB962C8B-B14F-4D97-AF65-F5344CB8AC3E}">
+        <p14:creationId xmlns:p14="http://schemas.microsoft.com/office/powerpoint/2010/main" val="2673958769"/>
+      </p:ext>
+    </p:extLst>
+  </p:cSld>
+  <p:clrMapOvr>
+    <a:masterClrMapping/>
+  </p:clrMapOvr>
+</p:sld>
+</file>
+
+<file path=ppt/slides/slide19.xml><?xml version="1.0" encoding="utf-8"?>
+<p:sld xmlns:a="http://schemas.openxmlformats.org/drawingml/2006/main" xmlns:r="http://schemas.openxmlformats.org/officeDocument/2006/relationships" xmlns:p="http://schemas.openxmlformats.org/presentationml/2006/main">
+  <p:cSld>
+    <p:spTree>
+      <p:nvGrpSpPr>
+        <p:cNvPr id="1" name="">
+          <a:extLst>
+            <a:ext uri="{FF2B5EF4-FFF2-40B4-BE49-F238E27FC236}">
+              <a16:creationId xmlns:a16="http://schemas.microsoft.com/office/drawing/2014/main" id="{FD5DD7A7-F9EC-2675-0419-F770408172D5}"/>
+            </a:ext>
+          </a:extLst>
+        </p:cNvPr>
+        <p:cNvGrpSpPr/>
+        <p:nvPr/>
+      </p:nvGrpSpPr>
+      <p:grpSpPr>
+        <a:xfrm>
+          <a:off x="0" y="0"/>
+          <a:ext cx="0" cy="0"/>
+          <a:chOff x="0" y="0"/>
+          <a:chExt cx="0" cy="0"/>
+        </a:xfrm>
+      </p:grpSpPr>
+      <p:sp>
+        <p:nvSpPr>
+          <p:cNvPr id="5" name="內容版面配置區 4">
+            <a:extLst>
+              <a:ext uri="{FF2B5EF4-FFF2-40B4-BE49-F238E27FC236}">
+                <a16:creationId xmlns:a16="http://schemas.microsoft.com/office/drawing/2014/main" id="{8EE4FD8F-0584-D629-480E-EF17B0080695}"/>
+              </a:ext>
+            </a:extLst>
+          </p:cNvPr>
+          <p:cNvSpPr>
+            <a:spLocks noGrp="1"/>
+          </p:cNvSpPr>
+          <p:nvPr>
+            <p:ph idx="1"/>
+          </p:nvPr>
+        </p:nvSpPr>
+        <p:spPr>
+          <a:xfrm>
+            <a:off x="0" y="2084853"/>
+            <a:ext cx="12192000" cy="2404863"/>
+          </a:xfrm>
+        </p:spPr>
+        <p:txBody>
+          <a:bodyPr anchor="ctr">
+            <a:normAutofit/>
+          </a:bodyPr>
+          <a:lstStyle/>
+          <a:p>
+            <a:pPr marL="0" indent="0" algn="ctr">
+              <a:buNone/>
+            </a:pPr>
+            <a:r>
+              <a:rPr lang="zh-TW" altLang="en-US" sz="6400" b="1" dirty="0">
+                <a:solidFill>
+                  <a:srgbClr val="660033"/>
+                </a:solidFill>
+                <a:latin typeface="Microsoft JhengHei" pitchFamily="34" charset="-120"/>
+                <a:ea typeface="Microsoft JhengHei" pitchFamily="34" charset="-120"/>
+              </a:rPr>
+              <a:t>主永遠不離他  到世世無窮</a:t>
+            </a:r>
+          </a:p>
+        </p:txBody>
+      </p:sp>
+      <p:sp>
+        <p:nvSpPr>
+          <p:cNvPr id="3" name="TextBox 2">
+            <a:extLst>
+              <a:ext uri="{FF2B5EF4-FFF2-40B4-BE49-F238E27FC236}">
+                <a16:creationId xmlns:a16="http://schemas.microsoft.com/office/drawing/2014/main" id="{964AF2A6-CD3E-C2FE-AA3B-0C6A525D0C95}"/>
+              </a:ext>
+            </a:extLst>
+          </p:cNvPr>
+          <p:cNvSpPr txBox="1"/>
+          <p:nvPr/>
+        </p:nvSpPr>
+        <p:spPr>
+          <a:xfrm>
+            <a:off x="0" y="5156201"/>
+            <a:ext cx="12192000" cy="584775"/>
+          </a:xfrm>
+          <a:prstGeom prst="rect">
+            <a:avLst/>
+          </a:prstGeom>
+          <a:noFill/>
+        </p:spPr>
+        <p:txBody>
+          <a:bodyPr wrap="square" rtlCol="0">
+            <a:spAutoFit/>
+          </a:bodyPr>
+          <a:lstStyle/>
+          <a:p>
+            <a:pPr algn="ctr"/>
+            <a:r>
+              <a:rPr lang="en-US" sz="3200" b="1" dirty="0">
+                <a:solidFill>
+                  <a:srgbClr val="660033"/>
+                </a:solidFill>
+              </a:rPr>
+              <a:t>( 6 / 6 )</a:t>
+            </a:r>
+            <a:endParaRPr lang="vi-VN" sz="3200" b="1" dirty="0">
+              <a:solidFill>
+                <a:srgbClr val="660033"/>
+              </a:solidFill>
+            </a:endParaRPr>
+          </a:p>
+        </p:txBody>
+      </p:sp>
+    </p:spTree>
+    <p:extLst>
+      <p:ext uri="{BB962C8B-B14F-4D97-AF65-F5344CB8AC3E}">
+        <p14:creationId xmlns:p14="http://schemas.microsoft.com/office/powerpoint/2010/main" val="480851318"/>
       </p:ext>
     </p:extLst>
   </p:cSld>
@@ -3319,144 +4589,67 @@
       </p:grpSpPr>
       <p:sp>
         <p:nvSpPr>
-          <p:cNvPr id="2" name="Title 1"/>
-          <p:cNvSpPr>
-            <a:spLocks noGrp="1"/>
-          </p:cNvSpPr>
-          <p:nvPr>
-            <p:ph type="title"/>
-          </p:nvPr>
-        </p:nvSpPr>
-        <p:spPr/>
-        <p:txBody>
-          <a:bodyPr>
+          <p:cNvPr id="5" name="內容版面配置區 4"/>
+          <p:cNvSpPr>
+            <a:spLocks noGrp="1"/>
+          </p:cNvSpPr>
+          <p:nvPr>
+            <p:ph idx="1"/>
+          </p:nvPr>
+        </p:nvSpPr>
+        <p:spPr>
+          <a:xfrm>
+            <a:off x="0" y="2084853"/>
+            <a:ext cx="12192000" cy="2404863"/>
+          </a:xfrm>
+        </p:spPr>
+        <p:txBody>
+          <a:bodyPr anchor="ctr">
             <a:normAutofit/>
           </a:bodyPr>
           <a:lstStyle/>
           <a:p>
-            <a:r>
-              <a:rPr lang="zh-CN" altLang="en-US" sz="4800" b="1" dirty="0" smtClean="0">
-                <a:latin typeface="Microsoft JhengHei" panose="020B0604030504040204" pitchFamily="34" charset="-120"/>
-                <a:ea typeface="Microsoft JhengHei" panose="020B0604030504040204" pitchFamily="34" charset="-120"/>
+            <a:pPr marL="0" indent="0" algn="ctr">
+              <a:buNone/>
+            </a:pPr>
+            <a:r>
+              <a:rPr lang="zh-TW" altLang="en-US" sz="6400" b="1" dirty="0">
+                <a:solidFill>
+                  <a:srgbClr val="660033"/>
+                </a:solidFill>
+                <a:latin typeface="Microsoft JhengHei" pitchFamily="34" charset="-120"/>
+                <a:ea typeface="Microsoft JhengHei" pitchFamily="34" charset="-120"/>
               </a:rPr>
-              <a:t>穩當的根基</a:t>
-            </a:r>
-            <a:endParaRPr lang="vi-VN" sz="4800" b="1" dirty="0">
-              <a:ea typeface="Microsoft JhengHei" panose="020B0604030504040204" pitchFamily="34" charset="-120"/>
-            </a:endParaRPr>
-          </a:p>
-        </p:txBody>
-      </p:sp>
-      <p:sp>
-        <p:nvSpPr>
-          <p:cNvPr id="3" name="Content Placeholder 2"/>
-          <p:cNvSpPr>
-            <a:spLocks noGrp="1"/>
-          </p:cNvSpPr>
-          <p:nvPr>
-            <p:ph idx="1"/>
-          </p:nvPr>
-        </p:nvSpPr>
-        <p:spPr/>
-        <p:txBody>
-          <a:bodyPr>
-            <a:noAutofit/>
-          </a:bodyPr>
-          <a:lstStyle/>
+              <a:t>主耶穌眾門徒  有穩當根基</a:t>
+            </a:r>
+          </a:p>
           <a:p>
             <a:pPr marL="0" indent="0" algn="ctr">
               <a:buNone/>
             </a:pPr>
             <a:r>
-              <a:rPr lang="zh-CN" altLang="en-US" sz="5400" b="1" dirty="0" smtClean="0">
-                <a:ea typeface="Microsoft JhengHei" panose="020B0604030504040204" pitchFamily="34" charset="-120"/>
+              <a:rPr lang="zh-TW" altLang="en-US" sz="6400" b="1" dirty="0">
+                <a:solidFill>
+                  <a:srgbClr val="660033"/>
+                </a:solidFill>
+                <a:latin typeface="Microsoft JhengHei" pitchFamily="34" charset="-120"/>
+                <a:ea typeface="Microsoft JhengHei" pitchFamily="34" charset="-120"/>
               </a:rPr>
-              <a:t>須聽主今說道  你不要懼怕</a:t>
-            </a:r>
-            <a:endParaRPr lang="en-US" altLang="zh-CN" sz="5400" b="1" dirty="0" smtClean="0">
-              <a:ea typeface="Microsoft JhengHei" panose="020B0604030504040204" pitchFamily="34" charset="-120"/>
-            </a:endParaRPr>
-          </a:p>
-          <a:p>
-            <a:pPr marL="0" indent="0" algn="ctr">
-              <a:buNone/>
-            </a:pPr>
-            <a:r>
-              <a:rPr lang="zh-CN" altLang="en-US" sz="5400" b="1" dirty="0">
-                <a:ea typeface="Microsoft JhengHei" panose="020B0604030504040204" pitchFamily="34" charset="-120"/>
-              </a:rPr>
-              <a:t>我永遠護庇你  在翅</a:t>
-            </a:r>
-            <a:r>
-              <a:rPr lang="zh-CN" altLang="en-US" sz="5400" b="1" dirty="0" smtClean="0">
-                <a:ea typeface="Microsoft JhengHei" panose="020B0604030504040204" pitchFamily="34" charset="-120"/>
-              </a:rPr>
-              <a:t>膀之下</a:t>
-            </a:r>
-            <a:endParaRPr lang="en-US" altLang="zh-CN" sz="5400" b="1" dirty="0" smtClean="0">
-              <a:ea typeface="Microsoft JhengHei" panose="020B0604030504040204" pitchFamily="34" charset="-120"/>
-            </a:endParaRPr>
-          </a:p>
-          <a:p>
-            <a:pPr marL="0" indent="0" algn="ctr">
-              <a:buNone/>
-            </a:pPr>
-            <a:r>
-              <a:rPr lang="zh-CN" altLang="en-US" sz="5400" b="1" dirty="0" smtClean="0">
-                <a:ea typeface="Microsoft JhengHei" panose="020B0604030504040204" pitchFamily="34" charset="-120"/>
-              </a:rPr>
-              <a:t>總賜你有力量  能站立得住</a:t>
-            </a:r>
-            <a:endParaRPr lang="en-US" altLang="zh-CN" sz="5400" b="1" dirty="0" smtClean="0">
-              <a:ea typeface="Microsoft JhengHei" panose="020B0604030504040204" pitchFamily="34" charset="-120"/>
-            </a:endParaRPr>
-          </a:p>
-          <a:p>
-            <a:pPr marL="0" indent="0" algn="ctr">
-              <a:buNone/>
-            </a:pPr>
-            <a:r>
-              <a:rPr lang="zh-CN" altLang="en-US" sz="5400" b="1" dirty="0">
-                <a:ea typeface="Microsoft JhengHei" panose="020B0604030504040204" pitchFamily="34" charset="-120"/>
-              </a:rPr>
-              <a:t>我全</a:t>
-            </a:r>
-            <a:r>
-              <a:rPr lang="zh-CN" altLang="en-US" sz="5400" b="1" dirty="0" smtClean="0">
-                <a:ea typeface="Microsoft JhengHei" panose="020B0604030504040204" pitchFamily="34" charset="-120"/>
-              </a:rPr>
-              <a:t>能的右手  要將你扶助</a:t>
-            </a:r>
-            <a:endParaRPr lang="en-US" altLang="zh-CN" sz="5400" b="1" dirty="0" smtClean="0">
-              <a:ea typeface="Microsoft JhengHei" panose="020B0604030504040204" pitchFamily="34" charset="-120"/>
-            </a:endParaRPr>
-          </a:p>
-          <a:p>
-            <a:pPr marL="0" indent="0" algn="ctr">
-              <a:buNone/>
-            </a:pPr>
-            <a:r>
-              <a:rPr lang="zh-CN" altLang="en-US" sz="5400" b="1" dirty="0">
-                <a:ea typeface="Microsoft JhengHei" panose="020B0604030504040204" pitchFamily="34" charset="-120"/>
-              </a:rPr>
-              <a:t>我全能的右手  要將你扶助</a:t>
-            </a:r>
-            <a:endParaRPr lang="vi-VN" sz="5400" b="1" dirty="0">
-              <a:ea typeface="Microsoft JhengHei" panose="020B0604030504040204" pitchFamily="34" charset="-120"/>
-            </a:endParaRPr>
-          </a:p>
-        </p:txBody>
-      </p:sp>
-      <p:sp>
-        <p:nvSpPr>
-          <p:cNvPr id="4" name="TextBox 3"/>
+              <a:t>即真神的言語  在聖書所記</a:t>
+            </a:r>
+          </a:p>
+        </p:txBody>
+      </p:sp>
+      <p:sp>
+        <p:nvSpPr>
+          <p:cNvPr id="3" name="TextBox 2"/>
           <p:cNvSpPr txBox="1"/>
           <p:nvPr/>
         </p:nvSpPr>
         <p:spPr>
           <a:xfrm>
-            <a:off x="445272" y="1741336"/>
-            <a:ext cx="898498" cy="830997"/>
+            <a:off x="0" y="5156201"/>
+            <a:ext cx="12192000" cy="584775"/>
           </a:xfrm>
           <a:prstGeom prst="rect">
             <a:avLst/>
@@ -3469,22 +4662,27 @@
           </a:bodyPr>
           <a:lstStyle/>
           <a:p>
-            <a:r>
-              <a:rPr lang="en-US" sz="4800" b="1" dirty="0"/>
-              <a:t>2</a:t>
-            </a:r>
-            <a:r>
-              <a:rPr lang="en-US" sz="4800" b="1" dirty="0" smtClean="0"/>
-              <a:t>.</a:t>
-            </a:r>
-            <a:endParaRPr lang="vi-VN" sz="4800" b="1" dirty="0"/>
+            <a:pPr algn="ctr"/>
+            <a:r>
+              <a:rPr lang="en-US" sz="3200" b="1" dirty="0">
+                <a:solidFill>
+                  <a:srgbClr val="660033"/>
+                </a:solidFill>
+              </a:rPr>
+              <a:t>( 1 / 6 )</a:t>
+            </a:r>
+            <a:endParaRPr lang="vi-VN" sz="3200" b="1" dirty="0">
+              <a:solidFill>
+                <a:srgbClr val="660033"/>
+              </a:solidFill>
+            </a:endParaRPr>
           </a:p>
         </p:txBody>
       </p:sp>
     </p:spTree>
     <p:extLst>
       <p:ext uri="{BB962C8B-B14F-4D97-AF65-F5344CB8AC3E}">
-        <p14:creationId xmlns:p14="http://schemas.microsoft.com/office/powerpoint/2010/main" val="1209553381"/>
+        <p14:creationId xmlns:p14="http://schemas.microsoft.com/office/powerpoint/2010/main" val="1407003638"/>
       </p:ext>
     </p:extLst>
   </p:cSld>
@@ -3499,7 +4697,13 @@
   <p:cSld>
     <p:spTree>
       <p:nvGrpSpPr>
-        <p:cNvPr id="1" name=""/>
+        <p:cNvPr id="1" name="">
+          <a:extLst>
+            <a:ext uri="{FF2B5EF4-FFF2-40B4-BE49-F238E27FC236}">
+              <a16:creationId xmlns:a16="http://schemas.microsoft.com/office/drawing/2014/main" id="{D678E27C-E40E-7DA0-76B9-971B9593853D}"/>
+            </a:ext>
+          </a:extLst>
+        </p:cNvPr>
         <p:cNvGrpSpPr/>
         <p:nvPr/>
       </p:nvGrpSpPr>
@@ -3513,138 +4717,86 @@
       </p:grpSpPr>
       <p:sp>
         <p:nvSpPr>
-          <p:cNvPr id="2" name="Title 1"/>
-          <p:cNvSpPr>
-            <a:spLocks noGrp="1"/>
-          </p:cNvSpPr>
-          <p:nvPr>
-            <p:ph type="title"/>
-          </p:nvPr>
-        </p:nvSpPr>
-        <p:spPr/>
-        <p:txBody>
-          <a:bodyPr>
+          <p:cNvPr id="5" name="內容版面配置區 4">
+            <a:extLst>
+              <a:ext uri="{FF2B5EF4-FFF2-40B4-BE49-F238E27FC236}">
+                <a16:creationId xmlns:a16="http://schemas.microsoft.com/office/drawing/2014/main" id="{C55A395C-9CA2-F08A-0763-094DCDFB4328}"/>
+              </a:ext>
+            </a:extLst>
+          </p:cNvPr>
+          <p:cNvSpPr>
+            <a:spLocks noGrp="1"/>
+          </p:cNvSpPr>
+          <p:nvPr>
+            <p:ph idx="1"/>
+          </p:nvPr>
+        </p:nvSpPr>
+        <p:spPr>
+          <a:xfrm>
+            <a:off x="0" y="2084853"/>
+            <a:ext cx="12192000" cy="2404863"/>
+          </a:xfrm>
+        </p:spPr>
+        <p:txBody>
+          <a:bodyPr anchor="ctr">
             <a:normAutofit/>
           </a:bodyPr>
           <a:lstStyle/>
           <a:p>
-            <a:r>
-              <a:rPr lang="zh-CN" altLang="en-US" sz="4800" b="1" dirty="0" smtClean="0">
-                <a:latin typeface="Microsoft JhengHei" panose="020B0604030504040204" pitchFamily="34" charset="-120"/>
-                <a:ea typeface="Microsoft JhengHei" panose="020B0604030504040204" pitchFamily="34" charset="-120"/>
+            <a:pPr marL="0" indent="0" algn="ctr">
+              <a:buNone/>
+            </a:pPr>
+            <a:r>
+              <a:rPr lang="zh-TW" altLang="en-US" sz="6400" b="1" dirty="0">
+                <a:solidFill>
+                  <a:srgbClr val="660033"/>
+                </a:solidFill>
+                <a:latin typeface="Microsoft JhengHei" pitchFamily="34" charset="-120"/>
+                <a:ea typeface="Microsoft JhengHei" pitchFamily="34" charset="-120"/>
               </a:rPr>
-              <a:t>穩當的根基</a:t>
-            </a:r>
-            <a:endParaRPr lang="vi-VN" sz="4800" b="1" dirty="0">
-              <a:ea typeface="Microsoft JhengHei" panose="020B0604030504040204" pitchFamily="34" charset="-120"/>
+              <a:t>你既然到主前  要躲避罪惡</a:t>
+            </a:r>
+            <a:endParaRPr lang="en-US" altLang="zh-TW" sz="6400" b="1" dirty="0">
+              <a:solidFill>
+                <a:srgbClr val="660033"/>
+              </a:solidFill>
+              <a:latin typeface="Microsoft JhengHei" pitchFamily="34" charset="-120"/>
+              <a:ea typeface="Microsoft JhengHei" pitchFamily="34" charset="-120"/>
             </a:endParaRPr>
           </a:p>
-        </p:txBody>
-      </p:sp>
-      <p:sp>
-        <p:nvSpPr>
-          <p:cNvPr id="3" name="Content Placeholder 2"/>
-          <p:cNvSpPr>
-            <a:spLocks noGrp="1"/>
-          </p:cNvSpPr>
-          <p:nvPr>
-            <p:ph idx="1"/>
-          </p:nvPr>
-        </p:nvSpPr>
-        <p:spPr/>
-        <p:txBody>
-          <a:bodyPr>
-            <a:noAutofit/>
-          </a:bodyPr>
-          <a:lstStyle/>
           <a:p>
             <a:pPr marL="0" indent="0" algn="ctr">
               <a:buNone/>
             </a:pPr>
             <a:r>
-              <a:rPr lang="zh-CN" altLang="en-US" sz="5400" b="1" dirty="0" smtClean="0">
-                <a:ea typeface="Microsoft JhengHei" panose="020B0604030504040204" pitchFamily="34" charset="-120"/>
+              <a:rPr lang="zh-TW" altLang="en-US" sz="6400" b="1" dirty="0">
+                <a:solidFill>
+                  <a:srgbClr val="660033"/>
+                </a:solidFill>
+                <a:latin typeface="Microsoft JhengHei" pitchFamily="34" charset="-120"/>
+                <a:ea typeface="Microsoft JhengHei" pitchFamily="34" charset="-120"/>
               </a:rPr>
-              <a:t>雖遇見諸患難  如經歷水中</a:t>
-            </a:r>
-            <a:endParaRPr lang="en-US" altLang="zh-CN" sz="5400" b="1" dirty="0" smtClean="0">
-              <a:ea typeface="Microsoft JhengHei" panose="020B0604030504040204" pitchFamily="34" charset="-120"/>
-            </a:endParaRPr>
-          </a:p>
-          <a:p>
-            <a:pPr marL="0" indent="0" algn="ctr">
-              <a:buNone/>
-            </a:pPr>
-            <a:r>
-              <a:rPr lang="zh-CN" altLang="en-US" sz="5400" b="1" dirty="0" smtClean="0">
-                <a:ea typeface="Microsoft JhengHei" panose="020B0604030504040204" pitchFamily="34" charset="-120"/>
-              </a:rPr>
-              <a:t>那波浪雖翻騰  不能把你沖</a:t>
-            </a:r>
-            <a:endParaRPr lang="en-US" altLang="zh-CN" sz="5400" b="1" dirty="0" smtClean="0">
-              <a:ea typeface="Microsoft JhengHei" panose="020B0604030504040204" pitchFamily="34" charset="-120"/>
-            </a:endParaRPr>
-          </a:p>
-          <a:p>
-            <a:pPr marL="0" indent="0" algn="ctr">
-              <a:buNone/>
-            </a:pPr>
-            <a:r>
-              <a:rPr lang="zh-CN" altLang="en-US" sz="5400" b="1" dirty="0" smtClean="0">
-                <a:ea typeface="Microsoft JhengHei" panose="020B0604030504040204" pitchFamily="34" charset="-120"/>
-              </a:rPr>
-              <a:t>我時常必保佑  叫苦變成甘</a:t>
-            </a:r>
-            <a:endParaRPr lang="en-US" altLang="zh-CN" sz="5400" b="1" dirty="0" smtClean="0">
-              <a:ea typeface="Microsoft JhengHei" panose="020B0604030504040204" pitchFamily="34" charset="-120"/>
-            </a:endParaRPr>
-          </a:p>
-          <a:p>
-            <a:pPr marL="0" indent="0" algn="ctr">
-              <a:buNone/>
-            </a:pPr>
-            <a:r>
-              <a:rPr lang="zh-CN" altLang="en-US" sz="5400" b="1" dirty="0" smtClean="0">
-                <a:ea typeface="Microsoft JhengHei" panose="020B0604030504040204" pitchFamily="34" charset="-120"/>
-              </a:rPr>
-              <a:t>終叫你成聖潔  而永得平安</a:t>
-            </a:r>
-            <a:endParaRPr lang="en-US" altLang="zh-CN" sz="5400" b="1" dirty="0" smtClean="0">
-              <a:ea typeface="Microsoft JhengHei" panose="020B0604030504040204" pitchFamily="34" charset="-120"/>
-            </a:endParaRPr>
-          </a:p>
-          <a:p>
-            <a:pPr marL="0" indent="0" algn="ctr">
-              <a:buNone/>
-            </a:pPr>
-            <a:r>
-              <a:rPr lang="zh-CN" altLang="en-US" sz="5400" b="1" dirty="0">
-                <a:ea typeface="Microsoft JhengHei" panose="020B0604030504040204" pitchFamily="34" charset="-120"/>
-              </a:rPr>
-              <a:t>終叫你成聖潔  而永得平</a:t>
-            </a:r>
-            <a:r>
-              <a:rPr lang="zh-CN" altLang="en-US" sz="5400" b="1" dirty="0" smtClean="0">
-                <a:ea typeface="Microsoft JhengHei" panose="020B0604030504040204" pitchFamily="34" charset="-120"/>
-              </a:rPr>
-              <a:t>安</a:t>
-            </a:r>
-            <a:endParaRPr lang="vi-VN" sz="5400" b="1" dirty="0">
-              <a:ea typeface="Microsoft JhengHei" panose="020B0604030504040204" pitchFamily="34" charset="-120"/>
-            </a:endParaRPr>
-          </a:p>
-        </p:txBody>
-      </p:sp>
-      <p:sp>
-        <p:nvSpPr>
-          <p:cNvPr id="4" name="TextBox 3"/>
+              <a:t>所盼望的福氣  實在是穩妥</a:t>
+            </a:r>
+          </a:p>
+        </p:txBody>
+      </p:sp>
+      <p:sp>
+        <p:nvSpPr>
+          <p:cNvPr id="3" name="TextBox 2">
+            <a:extLst>
+              <a:ext uri="{FF2B5EF4-FFF2-40B4-BE49-F238E27FC236}">
+                <a16:creationId xmlns:a16="http://schemas.microsoft.com/office/drawing/2014/main" id="{8AAB1AED-CB4C-8BF3-C4A0-B95EAB0C4FDB}"/>
+              </a:ext>
+            </a:extLst>
+          </p:cNvPr>
           <p:cNvSpPr txBox="1"/>
           <p:nvPr/>
         </p:nvSpPr>
         <p:spPr>
           <a:xfrm>
-            <a:off x="445272" y="1741336"/>
-            <a:ext cx="898498" cy="830997"/>
+            <a:off x="0" y="5156201"/>
+            <a:ext cx="12192000" cy="584775"/>
           </a:xfrm>
           <a:prstGeom prst="rect">
             <a:avLst/>
@@ -3657,18 +4809,27 @@
           </a:bodyPr>
           <a:lstStyle/>
           <a:p>
-            <a:r>
-              <a:rPr lang="en-US" sz="4800" b="1" dirty="0" smtClean="0"/>
-              <a:t>3.</a:t>
-            </a:r>
-            <a:endParaRPr lang="vi-VN" sz="4800" b="1" dirty="0"/>
+            <a:pPr algn="ctr"/>
+            <a:r>
+              <a:rPr lang="en-US" sz="3200" b="1" dirty="0">
+                <a:solidFill>
+                  <a:srgbClr val="660033"/>
+                </a:solidFill>
+              </a:rPr>
+              <a:t>( 1 / 6 )</a:t>
+            </a:r>
+            <a:endParaRPr lang="vi-VN" sz="3200" b="1" dirty="0">
+              <a:solidFill>
+                <a:srgbClr val="660033"/>
+              </a:solidFill>
+            </a:endParaRPr>
           </a:p>
         </p:txBody>
       </p:sp>
     </p:spTree>
     <p:extLst>
       <p:ext uri="{BB962C8B-B14F-4D97-AF65-F5344CB8AC3E}">
-        <p14:creationId xmlns:p14="http://schemas.microsoft.com/office/powerpoint/2010/main" val="3446658974"/>
+        <p14:creationId xmlns:p14="http://schemas.microsoft.com/office/powerpoint/2010/main" val="768868968"/>
       </p:ext>
     </p:extLst>
   </p:cSld>
@@ -3683,7 +4844,13 @@
   <p:cSld>
     <p:spTree>
       <p:nvGrpSpPr>
-        <p:cNvPr id="1" name=""/>
+        <p:cNvPr id="1" name="">
+          <a:extLst>
+            <a:ext uri="{FF2B5EF4-FFF2-40B4-BE49-F238E27FC236}">
+              <a16:creationId xmlns:a16="http://schemas.microsoft.com/office/drawing/2014/main" id="{FE45BE23-63CD-F180-D019-53835EAFFA37}"/>
+            </a:ext>
+          </a:extLst>
+        </p:cNvPr>
         <p:cNvGrpSpPr/>
         <p:nvPr/>
       </p:nvGrpSpPr>
@@ -3697,138 +4864,64 @@
       </p:grpSpPr>
       <p:sp>
         <p:nvSpPr>
-          <p:cNvPr id="2" name="Title 1"/>
-          <p:cNvSpPr>
-            <a:spLocks noGrp="1"/>
-          </p:cNvSpPr>
-          <p:nvPr>
-            <p:ph type="title"/>
-          </p:nvPr>
-        </p:nvSpPr>
-        <p:spPr/>
-        <p:txBody>
-          <a:bodyPr>
+          <p:cNvPr id="5" name="內容版面配置區 4">
+            <a:extLst>
+              <a:ext uri="{FF2B5EF4-FFF2-40B4-BE49-F238E27FC236}">
+                <a16:creationId xmlns:a16="http://schemas.microsoft.com/office/drawing/2014/main" id="{BE15BA6F-54B1-7E10-D7D6-89A9567C6126}"/>
+              </a:ext>
+            </a:extLst>
+          </p:cNvPr>
+          <p:cNvSpPr>
+            <a:spLocks noGrp="1"/>
+          </p:cNvSpPr>
+          <p:nvPr>
+            <p:ph idx="1"/>
+          </p:nvPr>
+        </p:nvSpPr>
+        <p:spPr>
+          <a:xfrm>
+            <a:off x="0" y="2084853"/>
+            <a:ext cx="12192000" cy="2404863"/>
+          </a:xfrm>
+        </p:spPr>
+        <p:txBody>
+          <a:bodyPr anchor="ctr">
             <a:normAutofit/>
           </a:bodyPr>
           <a:lstStyle/>
           <a:p>
-            <a:r>
-              <a:rPr lang="zh-CN" altLang="en-US" sz="4800" b="1" dirty="0" smtClean="0">
-                <a:latin typeface="Microsoft JhengHei" panose="020B0604030504040204" pitchFamily="34" charset="-120"/>
-                <a:ea typeface="Microsoft JhengHei" panose="020B0604030504040204" pitchFamily="34" charset="-120"/>
+            <a:pPr marL="0" indent="0" algn="ctr">
+              <a:buNone/>
+            </a:pPr>
+            <a:r>
+              <a:rPr lang="zh-TW" altLang="en-US" sz="6400" b="1" dirty="0">
+                <a:solidFill>
+                  <a:srgbClr val="660033"/>
+                </a:solidFill>
+                <a:latin typeface="Microsoft JhengHei" pitchFamily="34" charset="-120"/>
+                <a:ea typeface="Microsoft JhengHei" pitchFamily="34" charset="-120"/>
               </a:rPr>
-              <a:t>穩當的根基</a:t>
-            </a:r>
-            <a:endParaRPr lang="vi-VN" sz="4800" b="1" dirty="0">
-              <a:ea typeface="Microsoft JhengHei" panose="020B0604030504040204" pitchFamily="34" charset="-120"/>
-            </a:endParaRPr>
-          </a:p>
-        </p:txBody>
-      </p:sp>
-      <p:sp>
-        <p:nvSpPr>
-          <p:cNvPr id="3" name="Content Placeholder 2"/>
-          <p:cNvSpPr>
-            <a:spLocks noGrp="1"/>
-          </p:cNvSpPr>
-          <p:nvPr>
-            <p:ph idx="1"/>
-          </p:nvPr>
-        </p:nvSpPr>
-        <p:spPr/>
-        <p:txBody>
-          <a:bodyPr>
-            <a:noAutofit/>
-          </a:bodyPr>
-          <a:lstStyle/>
-          <a:p>
-            <a:pPr marL="0" indent="0" algn="ctr">
-              <a:buNone/>
-            </a:pPr>
-            <a:r>
-              <a:rPr lang="zh-CN" altLang="en-US" sz="5400" b="1" dirty="0" smtClean="0">
-                <a:ea typeface="Microsoft JhengHei" panose="020B0604030504040204" pitchFamily="34" charset="-120"/>
-              </a:rPr>
-              <a:t>你雖受大試煉  由火裏經行</a:t>
-            </a:r>
-            <a:endParaRPr lang="en-US" altLang="zh-CN" sz="5400" b="1" dirty="0" smtClean="0">
-              <a:ea typeface="Microsoft JhengHei" panose="020B0604030504040204" pitchFamily="34" charset="-120"/>
-            </a:endParaRPr>
-          </a:p>
-          <a:p>
-            <a:pPr marL="0" indent="0" algn="ctr">
-              <a:buNone/>
-            </a:pPr>
-            <a:r>
-              <a:rPr lang="zh-CN" altLang="en-US" sz="5400" b="1" dirty="0" smtClean="0">
-                <a:ea typeface="Microsoft JhengHei" panose="020B0604030504040204" pitchFamily="34" charset="-120"/>
-              </a:rPr>
-              <a:t>我恩典無限量  火焰不能侵</a:t>
-            </a:r>
-            <a:endParaRPr lang="en-US" altLang="zh-CN" sz="5400" b="1" dirty="0" smtClean="0">
-              <a:ea typeface="Microsoft JhengHei" panose="020B0604030504040204" pitchFamily="34" charset="-120"/>
-            </a:endParaRPr>
-          </a:p>
-          <a:p>
-            <a:pPr marL="0" indent="0" algn="ctr">
-              <a:buNone/>
-            </a:pPr>
-            <a:r>
-              <a:rPr lang="zh-CN" altLang="en-US" sz="5400" b="1" dirty="0" smtClean="0">
-                <a:ea typeface="Microsoft JhengHei" panose="020B0604030504040204" pitchFamily="34" charset="-120"/>
-              </a:rPr>
-              <a:t>你所受的苦楚  是救主好意</a:t>
-            </a:r>
-            <a:endParaRPr lang="en-US" altLang="zh-CN" sz="5400" b="1" dirty="0" smtClean="0">
-              <a:ea typeface="Microsoft JhengHei" panose="020B0604030504040204" pitchFamily="34" charset="-120"/>
-            </a:endParaRPr>
-          </a:p>
-          <a:p>
-            <a:pPr marL="0" indent="0" algn="ctr">
-              <a:buNone/>
-            </a:pPr>
-            <a:r>
-              <a:rPr lang="zh-CN" altLang="en-US" sz="5400" b="1" dirty="0" smtClean="0">
-                <a:ea typeface="Microsoft JhengHei" panose="020B0604030504040204" pitchFamily="34" charset="-120"/>
-              </a:rPr>
-              <a:t>像金銀被熬煉  使你成利器</a:t>
-            </a:r>
-            <a:endParaRPr lang="en-US" altLang="zh-CN" sz="5400" b="1" dirty="0" smtClean="0">
-              <a:ea typeface="Microsoft JhengHei" panose="020B0604030504040204" pitchFamily="34" charset="-120"/>
-            </a:endParaRPr>
-          </a:p>
-          <a:p>
-            <a:pPr marL="0" indent="0" algn="ctr">
-              <a:buNone/>
-            </a:pPr>
-            <a:r>
-              <a:rPr lang="zh-CN" altLang="en-US" sz="5400" b="1" dirty="0">
-                <a:ea typeface="Microsoft JhengHei" panose="020B0604030504040204" pitchFamily="34" charset="-120"/>
-              </a:rPr>
-              <a:t>像金銀被熬煉  使你成利</a:t>
-            </a:r>
-            <a:r>
-              <a:rPr lang="zh-CN" altLang="en-US" sz="5400" b="1" dirty="0" smtClean="0">
-                <a:ea typeface="Microsoft JhengHei" panose="020B0604030504040204" pitchFamily="34" charset="-120"/>
-              </a:rPr>
-              <a:t>器</a:t>
-            </a:r>
-            <a:endParaRPr lang="vi-VN" sz="5400" b="1" dirty="0">
-              <a:ea typeface="Microsoft JhengHei" panose="020B0604030504040204" pitchFamily="34" charset="-120"/>
-            </a:endParaRPr>
-          </a:p>
-        </p:txBody>
-      </p:sp>
-      <p:sp>
-        <p:nvSpPr>
-          <p:cNvPr id="4" name="TextBox 3"/>
+              <a:t>所盼望的福氣  實在是穩妥</a:t>
+            </a:r>
+          </a:p>
+        </p:txBody>
+      </p:sp>
+      <p:sp>
+        <p:nvSpPr>
+          <p:cNvPr id="3" name="TextBox 2">
+            <a:extLst>
+              <a:ext uri="{FF2B5EF4-FFF2-40B4-BE49-F238E27FC236}">
+                <a16:creationId xmlns:a16="http://schemas.microsoft.com/office/drawing/2014/main" id="{E258EF44-1500-8907-DBE5-137E1226478C}"/>
+              </a:ext>
+            </a:extLst>
+          </p:cNvPr>
           <p:cNvSpPr txBox="1"/>
           <p:nvPr/>
         </p:nvSpPr>
         <p:spPr>
           <a:xfrm>
-            <a:off x="445272" y="1741336"/>
-            <a:ext cx="898498" cy="830997"/>
+            <a:off x="0" y="5156201"/>
+            <a:ext cx="12192000" cy="584775"/>
           </a:xfrm>
           <a:prstGeom prst="rect">
             <a:avLst/>
@@ -3841,22 +4934,27 @@
           </a:bodyPr>
           <a:lstStyle/>
           <a:p>
-            <a:r>
-              <a:rPr lang="en-US" sz="4800" b="1" dirty="0"/>
-              <a:t>4</a:t>
-            </a:r>
-            <a:r>
-              <a:rPr lang="en-US" sz="4800" b="1" dirty="0" smtClean="0"/>
-              <a:t>.</a:t>
-            </a:r>
-            <a:endParaRPr lang="vi-VN" sz="4800" b="1" dirty="0"/>
+            <a:pPr algn="ctr"/>
+            <a:r>
+              <a:rPr lang="en-US" sz="3200" b="1" dirty="0">
+                <a:solidFill>
+                  <a:srgbClr val="660033"/>
+                </a:solidFill>
+              </a:rPr>
+              <a:t>( 1 / 6 )</a:t>
+            </a:r>
+            <a:endParaRPr lang="vi-VN" sz="3200" b="1" dirty="0">
+              <a:solidFill>
+                <a:srgbClr val="660033"/>
+              </a:solidFill>
+            </a:endParaRPr>
           </a:p>
         </p:txBody>
       </p:sp>
     </p:spTree>
     <p:extLst>
       <p:ext uri="{BB962C8B-B14F-4D97-AF65-F5344CB8AC3E}">
-        <p14:creationId xmlns:p14="http://schemas.microsoft.com/office/powerpoint/2010/main" val="1599488208"/>
+        <p14:creationId xmlns:p14="http://schemas.microsoft.com/office/powerpoint/2010/main" val="1911549230"/>
       </p:ext>
     </p:extLst>
   </p:cSld>
@@ -3871,7 +4969,13 @@
   <p:cSld>
     <p:spTree>
       <p:nvGrpSpPr>
-        <p:cNvPr id="1" name=""/>
+        <p:cNvPr id="1" name="">
+          <a:extLst>
+            <a:ext uri="{FF2B5EF4-FFF2-40B4-BE49-F238E27FC236}">
+              <a16:creationId xmlns:a16="http://schemas.microsoft.com/office/drawing/2014/main" id="{0131B6B4-431B-3E70-1CE8-C32134F255FA}"/>
+            </a:ext>
+          </a:extLst>
+        </p:cNvPr>
         <p:cNvGrpSpPr/>
         <p:nvPr/>
       </p:nvGrpSpPr>
@@ -3885,156 +4989,79 @@
       </p:grpSpPr>
       <p:sp>
         <p:nvSpPr>
-          <p:cNvPr id="2" name="Title 1"/>
-          <p:cNvSpPr>
-            <a:spLocks noGrp="1"/>
-          </p:cNvSpPr>
-          <p:nvPr>
-            <p:ph type="title"/>
-          </p:nvPr>
-        </p:nvSpPr>
-        <p:spPr/>
-        <p:txBody>
-          <a:bodyPr>
+          <p:cNvPr id="5" name="內容版面配置區 4">
+            <a:extLst>
+              <a:ext uri="{FF2B5EF4-FFF2-40B4-BE49-F238E27FC236}">
+                <a16:creationId xmlns:a16="http://schemas.microsoft.com/office/drawing/2014/main" id="{572FA5E2-8219-686E-1D16-CC66ED654E74}"/>
+              </a:ext>
+            </a:extLst>
+          </p:cNvPr>
+          <p:cNvSpPr>
+            <a:spLocks noGrp="1"/>
+          </p:cNvSpPr>
+          <p:nvPr>
+            <p:ph idx="1"/>
+          </p:nvPr>
+        </p:nvSpPr>
+        <p:spPr>
+          <a:xfrm>
+            <a:off x="0" y="2084853"/>
+            <a:ext cx="12192000" cy="2404863"/>
+          </a:xfrm>
+        </p:spPr>
+        <p:txBody>
+          <a:bodyPr anchor="ctr">
             <a:normAutofit/>
           </a:bodyPr>
           <a:lstStyle/>
           <a:p>
-            <a:r>
-              <a:rPr lang="zh-CN" altLang="en-US" sz="4800" b="1" dirty="0" smtClean="0">
-                <a:latin typeface="Microsoft JhengHei" panose="020B0604030504040204" pitchFamily="34" charset="-120"/>
-                <a:ea typeface="Microsoft JhengHei" panose="020B0604030504040204" pitchFamily="34" charset="-120"/>
+            <a:pPr marL="0" indent="0" algn="ctr">
+              <a:buNone/>
+            </a:pPr>
+            <a:r>
+              <a:rPr lang="zh-TW" altLang="en-US" sz="6400" b="1" dirty="0">
+                <a:solidFill>
+                  <a:srgbClr val="660033"/>
+                </a:solidFill>
+                <a:latin typeface="Microsoft JhengHei" pitchFamily="34" charset="-120"/>
+                <a:ea typeface="Microsoft JhengHei" pitchFamily="34" charset="-120"/>
               </a:rPr>
-              <a:t>穩當的根基</a:t>
-            </a:r>
-            <a:endParaRPr lang="vi-VN" sz="4800" b="1" dirty="0">
-              <a:ea typeface="Microsoft JhengHei" panose="020B0604030504040204" pitchFamily="34" charset="-120"/>
-            </a:endParaRPr>
-          </a:p>
-        </p:txBody>
-      </p:sp>
-      <p:sp>
-        <p:nvSpPr>
-          <p:cNvPr id="3" name="Content Placeholder 2"/>
-          <p:cNvSpPr>
-            <a:spLocks noGrp="1"/>
-          </p:cNvSpPr>
-          <p:nvPr>
-            <p:ph idx="1"/>
-          </p:nvPr>
-        </p:nvSpPr>
-        <p:spPr/>
-        <p:txBody>
-          <a:bodyPr>
-            <a:noAutofit/>
-          </a:bodyPr>
-          <a:lstStyle/>
+              <a:t>須聽主今說道  你不要懼怕</a:t>
+            </a:r>
+          </a:p>
           <a:p>
             <a:pPr marL="0" indent="0" algn="ctr">
               <a:buNone/>
             </a:pPr>
             <a:r>
-              <a:rPr lang="zh-CN" altLang="en-US" sz="5400" b="1" dirty="0">
-                <a:ea typeface="Microsoft JhengHei" panose="020B0604030504040204" pitchFamily="34" charset="-120"/>
+              <a:rPr lang="zh-TW" altLang="en-US" sz="6400" b="1" dirty="0">
+                <a:solidFill>
+                  <a:srgbClr val="660033"/>
+                </a:solidFill>
+                <a:latin typeface="Microsoft JhengHei" pitchFamily="34" charset="-120"/>
+                <a:ea typeface="Microsoft JhengHei" pitchFamily="34" charset="-120"/>
               </a:rPr>
-              <a:t>自幼時到年老  我保護</a:t>
-            </a:r>
-            <a:r>
-              <a:rPr lang="zh-CN" altLang="en-US" sz="5400" b="1" dirty="0" smtClean="0">
-                <a:ea typeface="Microsoft JhengHei" panose="020B0604030504040204" pitchFamily="34" charset="-120"/>
-              </a:rPr>
-              <a:t>甚密</a:t>
-            </a:r>
-            <a:endParaRPr lang="en-US" altLang="zh-CN" sz="5400" b="1" dirty="0" smtClean="0">
-              <a:ea typeface="Microsoft JhengHei" panose="020B0604030504040204" pitchFamily="34" charset="-120"/>
-            </a:endParaRPr>
-          </a:p>
-          <a:p>
-            <a:pPr marL="0" indent="0" algn="ctr">
-              <a:buNone/>
-            </a:pPr>
-            <a:r>
-              <a:rPr lang="zh-CN" altLang="en-US" sz="5400" b="1" dirty="0" smtClean="0">
-                <a:ea typeface="Microsoft JhengHei" panose="020B0604030504040204" pitchFamily="34" charset="-120"/>
-              </a:rPr>
-              <a:t>該知道我愛你  是永遠不息</a:t>
-            </a:r>
-            <a:endParaRPr lang="en-US" altLang="zh-CN" sz="5400" b="1" dirty="0" smtClean="0">
-              <a:ea typeface="Microsoft JhengHei" panose="020B0604030504040204" pitchFamily="34" charset="-120"/>
-            </a:endParaRPr>
-          </a:p>
-          <a:p>
-            <a:pPr marL="0" indent="0" algn="ctr">
-              <a:buNone/>
-            </a:pPr>
-            <a:r>
-              <a:rPr lang="zh-CN" altLang="en-US" sz="5400" b="1" dirty="0">
-                <a:ea typeface="Microsoft JhengHei" panose="020B0604030504040204" pitchFamily="34" charset="-120"/>
-              </a:rPr>
-              <a:t>直</a:t>
-            </a:r>
-            <a:r>
-              <a:rPr lang="zh-CN" altLang="en-US" sz="5400" b="1" dirty="0" smtClean="0">
-                <a:ea typeface="Microsoft JhengHei" panose="020B0604030504040204" pitchFamily="34" charset="-120"/>
-              </a:rPr>
-              <a:t>到頭髮白了  你力量衰弱</a:t>
-            </a:r>
-            <a:endParaRPr lang="en-US" altLang="zh-CN" sz="5400" b="1" dirty="0" smtClean="0">
-              <a:ea typeface="Microsoft JhengHei" panose="020B0604030504040204" pitchFamily="34" charset="-120"/>
-            </a:endParaRPr>
-          </a:p>
-          <a:p>
-            <a:pPr marL="0" indent="0" algn="ctr">
-              <a:buNone/>
-            </a:pPr>
-            <a:r>
-              <a:rPr lang="zh-CN" altLang="en-US" sz="5400" b="1" dirty="0">
-                <a:ea typeface="Microsoft JhengHei" panose="020B0604030504040204" pitchFamily="34" charset="-120"/>
-              </a:rPr>
-              <a:t>我仍然疼愛你  在懷裏抱</a:t>
-            </a:r>
-            <a:r>
-              <a:rPr lang="zh-CN" altLang="en-US" sz="5400" b="1" dirty="0" smtClean="0">
-                <a:ea typeface="Microsoft JhengHei" panose="020B0604030504040204" pitchFamily="34" charset="-120"/>
-              </a:rPr>
-              <a:t>着</a:t>
-            </a:r>
-            <a:endParaRPr lang="en-US" altLang="zh-CN" sz="5400" b="1" dirty="0" smtClean="0">
-              <a:ea typeface="Microsoft JhengHei" panose="020B0604030504040204" pitchFamily="34" charset="-120"/>
-            </a:endParaRPr>
-          </a:p>
-          <a:p>
-            <a:pPr marL="0" indent="0" algn="ctr">
-              <a:buNone/>
-            </a:pPr>
-            <a:r>
-              <a:rPr lang="zh-CN" altLang="en-US" sz="5400" b="1" dirty="0">
-                <a:ea typeface="Microsoft JhengHei" panose="020B0604030504040204" pitchFamily="34" charset="-120"/>
-              </a:rPr>
-              <a:t>我仍然疼愛你  在懷裏抱</a:t>
-            </a:r>
-            <a:r>
-              <a:rPr lang="zh-CN" altLang="en-US" sz="5400" b="1" dirty="0" smtClean="0">
-                <a:ea typeface="Microsoft JhengHei" panose="020B0604030504040204" pitchFamily="34" charset="-120"/>
-              </a:rPr>
-              <a:t>着</a:t>
-            </a:r>
-            <a:endParaRPr lang="vi-VN" sz="5400" b="1" dirty="0">
-              <a:ea typeface="Microsoft JhengHei" panose="020B0604030504040204" pitchFamily="34" charset="-120"/>
-            </a:endParaRPr>
-          </a:p>
-        </p:txBody>
-      </p:sp>
-      <p:sp>
-        <p:nvSpPr>
-          <p:cNvPr id="4" name="TextBox 3"/>
+              <a:t>我永遠護庇你  在翅膀之下</a:t>
+            </a:r>
+          </a:p>
+        </p:txBody>
+      </p:sp>
+      <p:sp>
+        <p:nvSpPr>
+          <p:cNvPr id="3" name="TextBox 2">
+            <a:extLst>
+              <a:ext uri="{FF2B5EF4-FFF2-40B4-BE49-F238E27FC236}">
+                <a16:creationId xmlns:a16="http://schemas.microsoft.com/office/drawing/2014/main" id="{BEAFD1DB-4DD0-71BE-BF38-84C7BDDD7FDA}"/>
+              </a:ext>
+            </a:extLst>
+          </p:cNvPr>
           <p:cNvSpPr txBox="1"/>
           <p:nvPr/>
         </p:nvSpPr>
         <p:spPr>
           <a:xfrm>
-            <a:off x="445272" y="1741336"/>
-            <a:ext cx="898498" cy="830997"/>
+            <a:off x="0" y="5156201"/>
+            <a:ext cx="12192000" cy="584775"/>
           </a:xfrm>
           <a:prstGeom prst="rect">
             <a:avLst/>
@@ -4047,18 +5074,27 @@
           </a:bodyPr>
           <a:lstStyle/>
           <a:p>
-            <a:r>
-              <a:rPr lang="en-US" sz="4800" b="1" dirty="0" smtClean="0"/>
-              <a:t>5.</a:t>
-            </a:r>
-            <a:endParaRPr lang="vi-VN" sz="4800" b="1" dirty="0"/>
+            <a:pPr algn="ctr"/>
+            <a:r>
+              <a:rPr lang="en-US" sz="3200" b="1" dirty="0">
+                <a:solidFill>
+                  <a:srgbClr val="660033"/>
+                </a:solidFill>
+              </a:rPr>
+              <a:t>( 2 / 6 )</a:t>
+            </a:r>
+            <a:endParaRPr lang="vi-VN" sz="3200" b="1" dirty="0">
+              <a:solidFill>
+                <a:srgbClr val="660033"/>
+              </a:solidFill>
+            </a:endParaRPr>
           </a:p>
         </p:txBody>
       </p:sp>
     </p:spTree>
     <p:extLst>
       <p:ext uri="{BB962C8B-B14F-4D97-AF65-F5344CB8AC3E}">
-        <p14:creationId xmlns:p14="http://schemas.microsoft.com/office/powerpoint/2010/main" val="29568096"/>
+        <p14:creationId xmlns:p14="http://schemas.microsoft.com/office/powerpoint/2010/main" val="3980982390"/>
       </p:ext>
     </p:extLst>
   </p:cSld>
@@ -4073,7 +5109,13 @@
   <p:cSld>
     <p:spTree>
       <p:nvGrpSpPr>
-        <p:cNvPr id="1" name=""/>
+        <p:cNvPr id="1" name="">
+          <a:extLst>
+            <a:ext uri="{FF2B5EF4-FFF2-40B4-BE49-F238E27FC236}">
+              <a16:creationId xmlns:a16="http://schemas.microsoft.com/office/drawing/2014/main" id="{6842BC14-ECC1-7CF2-E0E9-7C28843137C2}"/>
+            </a:ext>
+          </a:extLst>
+        </p:cNvPr>
         <p:cNvGrpSpPr/>
         <p:nvPr/>
       </p:nvGrpSpPr>
@@ -4087,144 +5129,79 @@
       </p:grpSpPr>
       <p:sp>
         <p:nvSpPr>
-          <p:cNvPr id="2" name="Title 1"/>
-          <p:cNvSpPr>
-            <a:spLocks noGrp="1"/>
-          </p:cNvSpPr>
-          <p:nvPr>
-            <p:ph type="title"/>
-          </p:nvPr>
-        </p:nvSpPr>
-        <p:spPr/>
-        <p:txBody>
-          <a:bodyPr>
+          <p:cNvPr id="5" name="內容版面配置區 4">
+            <a:extLst>
+              <a:ext uri="{FF2B5EF4-FFF2-40B4-BE49-F238E27FC236}">
+                <a16:creationId xmlns:a16="http://schemas.microsoft.com/office/drawing/2014/main" id="{50C53093-A0A8-CF22-7C75-38C68173F83E}"/>
+              </a:ext>
+            </a:extLst>
+          </p:cNvPr>
+          <p:cNvSpPr>
+            <a:spLocks noGrp="1"/>
+          </p:cNvSpPr>
+          <p:nvPr>
+            <p:ph idx="1"/>
+          </p:nvPr>
+        </p:nvSpPr>
+        <p:spPr>
+          <a:xfrm>
+            <a:off x="0" y="2084853"/>
+            <a:ext cx="12192000" cy="2404863"/>
+          </a:xfrm>
+        </p:spPr>
+        <p:txBody>
+          <a:bodyPr anchor="ctr">
             <a:normAutofit/>
           </a:bodyPr>
           <a:lstStyle/>
           <a:p>
-            <a:r>
-              <a:rPr lang="zh-CN" altLang="en-US" sz="4800" b="1" dirty="0" smtClean="0">
-                <a:latin typeface="Microsoft JhengHei" panose="020B0604030504040204" pitchFamily="34" charset="-120"/>
-                <a:ea typeface="Microsoft JhengHei" panose="020B0604030504040204" pitchFamily="34" charset="-120"/>
+            <a:pPr marL="0" indent="0" algn="ctr">
+              <a:buNone/>
+            </a:pPr>
+            <a:r>
+              <a:rPr lang="zh-TW" altLang="en-US" sz="6400" b="1" dirty="0">
+                <a:solidFill>
+                  <a:srgbClr val="660033"/>
+                </a:solidFill>
+                <a:latin typeface="Microsoft JhengHei" pitchFamily="34" charset="-120"/>
+                <a:ea typeface="Microsoft JhengHei" pitchFamily="34" charset="-120"/>
               </a:rPr>
-              <a:t>穩當的根基</a:t>
-            </a:r>
-            <a:endParaRPr lang="vi-VN" sz="4800" b="1" dirty="0">
-              <a:ea typeface="Microsoft JhengHei" panose="020B0604030504040204" pitchFamily="34" charset="-120"/>
-            </a:endParaRPr>
-          </a:p>
-        </p:txBody>
-      </p:sp>
-      <p:sp>
-        <p:nvSpPr>
-          <p:cNvPr id="3" name="Content Placeholder 2"/>
-          <p:cNvSpPr>
-            <a:spLocks noGrp="1"/>
-          </p:cNvSpPr>
-          <p:nvPr>
-            <p:ph idx="1"/>
-          </p:nvPr>
-        </p:nvSpPr>
-        <p:spPr/>
-        <p:txBody>
-          <a:bodyPr>
-            <a:noAutofit/>
-          </a:bodyPr>
-          <a:lstStyle/>
+              <a:t>總賜你有力量  能站立得住</a:t>
+            </a:r>
+          </a:p>
           <a:p>
             <a:pPr marL="0" indent="0" algn="ctr">
               <a:buNone/>
             </a:pPr>
             <a:r>
-              <a:rPr lang="zh-CN" altLang="en-US" sz="5400" b="1" dirty="0" smtClean="0">
-                <a:ea typeface="Microsoft JhengHei" panose="020B0604030504040204" pitchFamily="34" charset="-120"/>
+              <a:rPr lang="zh-TW" altLang="en-US" sz="6400" b="1" dirty="0">
+                <a:solidFill>
+                  <a:srgbClr val="660033"/>
+                </a:solidFill>
+                <a:latin typeface="Microsoft JhengHei" pitchFamily="34" charset="-120"/>
+                <a:ea typeface="Microsoft JhengHei" pitchFamily="34" charset="-120"/>
               </a:rPr>
-              <a:t>凡倚靠主耶穌  望靈魂得救</a:t>
-            </a:r>
-            <a:endParaRPr lang="en-US" altLang="zh-CN" sz="5400" b="1" dirty="0" smtClean="0">
-              <a:ea typeface="Microsoft JhengHei" panose="020B0604030504040204" pitchFamily="34" charset="-120"/>
-            </a:endParaRPr>
-          </a:p>
-          <a:p>
-            <a:pPr marL="0" indent="0" algn="ctr">
-              <a:buNone/>
-            </a:pPr>
-            <a:r>
-              <a:rPr lang="zh-CN" altLang="en-US" sz="5400" b="1" dirty="0">
-                <a:ea typeface="Microsoft JhengHei" panose="020B0604030504040204" pitchFamily="34" charset="-120"/>
-              </a:rPr>
-              <a:t>主萬不肯丟</a:t>
-            </a:r>
-            <a:r>
-              <a:rPr lang="zh-CN" altLang="en-US" sz="5400" b="1" dirty="0" smtClean="0">
-                <a:ea typeface="Microsoft JhengHei" panose="020B0604030504040204" pitchFamily="34" charset="-120"/>
-              </a:rPr>
-              <a:t>他  在仇敵惡手</a:t>
-            </a:r>
-            <a:endParaRPr lang="en-US" altLang="zh-CN" sz="5400" b="1" dirty="0" smtClean="0">
-              <a:ea typeface="Microsoft JhengHei" panose="020B0604030504040204" pitchFamily="34" charset="-120"/>
-            </a:endParaRPr>
-          </a:p>
-          <a:p>
-            <a:pPr marL="0" indent="0" algn="ctr">
-              <a:buNone/>
-            </a:pPr>
-            <a:r>
-              <a:rPr lang="zh-CN" altLang="en-US" sz="5400" b="1" dirty="0" smtClean="0">
-                <a:ea typeface="Microsoft JhengHei" panose="020B0604030504040204" pitchFamily="34" charset="-120"/>
-              </a:rPr>
-              <a:t>雖四面有邪惡  用計謀來攻</a:t>
-            </a:r>
-            <a:endParaRPr lang="en-US" altLang="zh-CN" sz="5400" b="1" dirty="0" smtClean="0">
-              <a:ea typeface="Microsoft JhengHei" panose="020B0604030504040204" pitchFamily="34" charset="-120"/>
-            </a:endParaRPr>
-          </a:p>
-          <a:p>
-            <a:pPr marL="0" indent="0" algn="ctr">
-              <a:buNone/>
-            </a:pPr>
-            <a:r>
-              <a:rPr lang="zh-CN" altLang="en-US" sz="5400" b="1" dirty="0" smtClean="0">
-                <a:ea typeface="Microsoft JhengHei" panose="020B0604030504040204" pitchFamily="34" charset="-120"/>
-              </a:rPr>
-              <a:t>主永遠不離他  到世世無窮</a:t>
-            </a:r>
-            <a:endParaRPr lang="en-US" altLang="zh-CN" sz="5400" b="1" dirty="0" smtClean="0">
-              <a:ea typeface="Microsoft JhengHei" panose="020B0604030504040204" pitchFamily="34" charset="-120"/>
-            </a:endParaRPr>
-          </a:p>
-          <a:p>
-            <a:pPr marL="0" indent="0" algn="ctr">
-              <a:buNone/>
-            </a:pPr>
-            <a:r>
-              <a:rPr lang="zh-CN" altLang="en-US" sz="5400" b="1" dirty="0">
-                <a:ea typeface="Microsoft JhengHei" panose="020B0604030504040204" pitchFamily="34" charset="-120"/>
-              </a:rPr>
-              <a:t>主永遠不離他  到世世無</a:t>
-            </a:r>
-            <a:r>
-              <a:rPr lang="zh-CN" altLang="en-US" sz="5400" b="1" dirty="0" smtClean="0">
-                <a:ea typeface="Microsoft JhengHei" panose="020B0604030504040204" pitchFamily="34" charset="-120"/>
-              </a:rPr>
-              <a:t>窮</a:t>
-            </a:r>
-            <a:endParaRPr lang="vi-VN" sz="5400" b="1" dirty="0">
-              <a:ea typeface="Microsoft JhengHei" panose="020B0604030504040204" pitchFamily="34" charset="-120"/>
-            </a:endParaRPr>
-          </a:p>
-        </p:txBody>
-      </p:sp>
-      <p:sp>
-        <p:nvSpPr>
-          <p:cNvPr id="4" name="TextBox 3"/>
+              <a:t>我全能的右手  要將你扶助</a:t>
+            </a:r>
+          </a:p>
+        </p:txBody>
+      </p:sp>
+      <p:sp>
+        <p:nvSpPr>
+          <p:cNvPr id="3" name="TextBox 2">
+            <a:extLst>
+              <a:ext uri="{FF2B5EF4-FFF2-40B4-BE49-F238E27FC236}">
+                <a16:creationId xmlns:a16="http://schemas.microsoft.com/office/drawing/2014/main" id="{103C348B-DBAF-37C3-B2B9-85FF4A5D3B94}"/>
+              </a:ext>
+            </a:extLst>
+          </p:cNvPr>
           <p:cNvSpPr txBox="1"/>
           <p:nvPr/>
         </p:nvSpPr>
         <p:spPr>
           <a:xfrm>
-            <a:off x="445272" y="1741336"/>
-            <a:ext cx="898498" cy="830997"/>
+            <a:off x="0" y="5156201"/>
+            <a:ext cx="12192000" cy="584775"/>
           </a:xfrm>
           <a:prstGeom prst="rect">
             <a:avLst/>
@@ -4237,22 +5214,432 @@
           </a:bodyPr>
           <a:lstStyle/>
           <a:p>
-            <a:r>
-              <a:rPr lang="en-US" sz="4800" b="1" dirty="0"/>
-              <a:t>6</a:t>
-            </a:r>
-            <a:r>
-              <a:rPr lang="en-US" sz="4800" b="1" dirty="0" smtClean="0"/>
-              <a:t>.</a:t>
-            </a:r>
-            <a:endParaRPr lang="vi-VN" sz="4800" b="1" dirty="0"/>
+            <a:pPr algn="ctr"/>
+            <a:r>
+              <a:rPr lang="en-US" sz="3200" b="1" dirty="0">
+                <a:solidFill>
+                  <a:srgbClr val="660033"/>
+                </a:solidFill>
+              </a:rPr>
+              <a:t>( 2 / 6 )</a:t>
+            </a:r>
+            <a:endParaRPr lang="vi-VN" sz="3200" b="1" dirty="0">
+              <a:solidFill>
+                <a:srgbClr val="660033"/>
+              </a:solidFill>
+            </a:endParaRPr>
           </a:p>
         </p:txBody>
       </p:sp>
     </p:spTree>
     <p:extLst>
       <p:ext uri="{BB962C8B-B14F-4D97-AF65-F5344CB8AC3E}">
-        <p14:creationId xmlns:p14="http://schemas.microsoft.com/office/powerpoint/2010/main" val="4011412583"/>
+        <p14:creationId xmlns:p14="http://schemas.microsoft.com/office/powerpoint/2010/main" val="1505623263"/>
+      </p:ext>
+    </p:extLst>
+  </p:cSld>
+  <p:clrMapOvr>
+    <a:masterClrMapping/>
+  </p:clrMapOvr>
+</p:sld>
+</file>
+
+<file path=ppt/slides/slide7.xml><?xml version="1.0" encoding="utf-8"?>
+<p:sld xmlns:a="http://schemas.openxmlformats.org/drawingml/2006/main" xmlns:r="http://schemas.openxmlformats.org/officeDocument/2006/relationships" xmlns:p="http://schemas.openxmlformats.org/presentationml/2006/main">
+  <p:cSld>
+    <p:spTree>
+      <p:nvGrpSpPr>
+        <p:cNvPr id="1" name="">
+          <a:extLst>
+            <a:ext uri="{FF2B5EF4-FFF2-40B4-BE49-F238E27FC236}">
+              <a16:creationId xmlns:a16="http://schemas.microsoft.com/office/drawing/2014/main" id="{E81199DA-F2A5-7279-A1D2-3D83FFAB723C}"/>
+            </a:ext>
+          </a:extLst>
+        </p:cNvPr>
+        <p:cNvGrpSpPr/>
+        <p:nvPr/>
+      </p:nvGrpSpPr>
+      <p:grpSpPr>
+        <a:xfrm>
+          <a:off x="0" y="0"/>
+          <a:ext cx="0" cy="0"/>
+          <a:chOff x="0" y="0"/>
+          <a:chExt cx="0" cy="0"/>
+        </a:xfrm>
+      </p:grpSpPr>
+      <p:sp>
+        <p:nvSpPr>
+          <p:cNvPr id="5" name="內容版面配置區 4">
+            <a:extLst>
+              <a:ext uri="{FF2B5EF4-FFF2-40B4-BE49-F238E27FC236}">
+                <a16:creationId xmlns:a16="http://schemas.microsoft.com/office/drawing/2014/main" id="{9CF1FF3B-6736-151C-7E65-9D1E2D3CCC12}"/>
+              </a:ext>
+            </a:extLst>
+          </p:cNvPr>
+          <p:cNvSpPr>
+            <a:spLocks noGrp="1"/>
+          </p:cNvSpPr>
+          <p:nvPr>
+            <p:ph idx="1"/>
+          </p:nvPr>
+        </p:nvSpPr>
+        <p:spPr>
+          <a:xfrm>
+            <a:off x="0" y="2084853"/>
+            <a:ext cx="12192000" cy="2404863"/>
+          </a:xfrm>
+        </p:spPr>
+        <p:txBody>
+          <a:bodyPr anchor="ctr">
+            <a:normAutofit/>
+          </a:bodyPr>
+          <a:lstStyle/>
+          <a:p>
+            <a:pPr marL="0" indent="0" algn="ctr">
+              <a:buNone/>
+            </a:pPr>
+            <a:r>
+              <a:rPr lang="zh-TW" altLang="en-US" sz="6400" b="1" dirty="0">
+                <a:solidFill>
+                  <a:srgbClr val="660033"/>
+                </a:solidFill>
+                <a:latin typeface="Microsoft JhengHei" pitchFamily="34" charset="-120"/>
+                <a:ea typeface="Microsoft JhengHei" pitchFamily="34" charset="-120"/>
+              </a:rPr>
+              <a:t>我全能的右手  要將你扶助</a:t>
+            </a:r>
+          </a:p>
+        </p:txBody>
+      </p:sp>
+      <p:sp>
+        <p:nvSpPr>
+          <p:cNvPr id="3" name="TextBox 2">
+            <a:extLst>
+              <a:ext uri="{FF2B5EF4-FFF2-40B4-BE49-F238E27FC236}">
+                <a16:creationId xmlns:a16="http://schemas.microsoft.com/office/drawing/2014/main" id="{24AB0D2B-392C-33C1-C896-D9545CE1406A}"/>
+              </a:ext>
+            </a:extLst>
+          </p:cNvPr>
+          <p:cNvSpPr txBox="1"/>
+          <p:nvPr/>
+        </p:nvSpPr>
+        <p:spPr>
+          <a:xfrm>
+            <a:off x="0" y="5156201"/>
+            <a:ext cx="12192000" cy="584775"/>
+          </a:xfrm>
+          <a:prstGeom prst="rect">
+            <a:avLst/>
+          </a:prstGeom>
+          <a:noFill/>
+        </p:spPr>
+        <p:txBody>
+          <a:bodyPr wrap="square" rtlCol="0">
+            <a:spAutoFit/>
+          </a:bodyPr>
+          <a:lstStyle/>
+          <a:p>
+            <a:pPr algn="ctr"/>
+            <a:r>
+              <a:rPr lang="en-US" sz="3200" b="1" dirty="0">
+                <a:solidFill>
+                  <a:srgbClr val="660033"/>
+                </a:solidFill>
+              </a:rPr>
+              <a:t>( 2 / 6 )</a:t>
+            </a:r>
+            <a:endParaRPr lang="vi-VN" sz="3200" b="1" dirty="0">
+              <a:solidFill>
+                <a:srgbClr val="660033"/>
+              </a:solidFill>
+            </a:endParaRPr>
+          </a:p>
+        </p:txBody>
+      </p:sp>
+    </p:spTree>
+    <p:extLst>
+      <p:ext uri="{BB962C8B-B14F-4D97-AF65-F5344CB8AC3E}">
+        <p14:creationId xmlns:p14="http://schemas.microsoft.com/office/powerpoint/2010/main" val="2246331305"/>
+      </p:ext>
+    </p:extLst>
+  </p:cSld>
+  <p:clrMapOvr>
+    <a:masterClrMapping/>
+  </p:clrMapOvr>
+</p:sld>
+</file>
+
+<file path=ppt/slides/slide8.xml><?xml version="1.0" encoding="utf-8"?>
+<p:sld xmlns:a="http://schemas.openxmlformats.org/drawingml/2006/main" xmlns:r="http://schemas.openxmlformats.org/officeDocument/2006/relationships" xmlns:p="http://schemas.openxmlformats.org/presentationml/2006/main">
+  <p:cSld>
+    <p:spTree>
+      <p:nvGrpSpPr>
+        <p:cNvPr id="1" name="">
+          <a:extLst>
+            <a:ext uri="{FF2B5EF4-FFF2-40B4-BE49-F238E27FC236}">
+              <a16:creationId xmlns:a16="http://schemas.microsoft.com/office/drawing/2014/main" id="{67DD8406-D042-0D40-5C69-A426FDD40B64}"/>
+            </a:ext>
+          </a:extLst>
+        </p:cNvPr>
+        <p:cNvGrpSpPr/>
+        <p:nvPr/>
+      </p:nvGrpSpPr>
+      <p:grpSpPr>
+        <a:xfrm>
+          <a:off x="0" y="0"/>
+          <a:ext cx="0" cy="0"/>
+          <a:chOff x="0" y="0"/>
+          <a:chExt cx="0" cy="0"/>
+        </a:xfrm>
+      </p:grpSpPr>
+      <p:sp>
+        <p:nvSpPr>
+          <p:cNvPr id="5" name="內容版面配置區 4">
+            <a:extLst>
+              <a:ext uri="{FF2B5EF4-FFF2-40B4-BE49-F238E27FC236}">
+                <a16:creationId xmlns:a16="http://schemas.microsoft.com/office/drawing/2014/main" id="{A78D01BD-E1A8-83B6-4100-C0C5A6D22BBF}"/>
+              </a:ext>
+            </a:extLst>
+          </p:cNvPr>
+          <p:cNvSpPr>
+            <a:spLocks noGrp="1"/>
+          </p:cNvSpPr>
+          <p:nvPr>
+            <p:ph idx="1"/>
+          </p:nvPr>
+        </p:nvSpPr>
+        <p:spPr>
+          <a:xfrm>
+            <a:off x="0" y="2084853"/>
+            <a:ext cx="12192000" cy="2404863"/>
+          </a:xfrm>
+        </p:spPr>
+        <p:txBody>
+          <a:bodyPr anchor="ctr">
+            <a:normAutofit/>
+          </a:bodyPr>
+          <a:lstStyle/>
+          <a:p>
+            <a:pPr marL="0" indent="0" algn="ctr">
+              <a:buNone/>
+            </a:pPr>
+            <a:r>
+              <a:rPr lang="zh-TW" altLang="en-US" sz="6400" b="1" dirty="0">
+                <a:solidFill>
+                  <a:srgbClr val="660033"/>
+                </a:solidFill>
+                <a:latin typeface="Microsoft JhengHei" pitchFamily="34" charset="-120"/>
+                <a:ea typeface="Microsoft JhengHei" pitchFamily="34" charset="-120"/>
+              </a:rPr>
+              <a:t>雖遇見諸患難  如經歷水中</a:t>
+            </a:r>
+          </a:p>
+          <a:p>
+            <a:pPr marL="0" indent="0" algn="ctr">
+              <a:buNone/>
+            </a:pPr>
+            <a:r>
+              <a:rPr lang="zh-TW" altLang="en-US" sz="6400" b="1" dirty="0">
+                <a:solidFill>
+                  <a:srgbClr val="660033"/>
+                </a:solidFill>
+                <a:latin typeface="Microsoft JhengHei" pitchFamily="34" charset="-120"/>
+                <a:ea typeface="Microsoft JhengHei" pitchFamily="34" charset="-120"/>
+              </a:rPr>
+              <a:t>那波浪雖翻騰  不能把你沖</a:t>
+            </a:r>
+          </a:p>
+        </p:txBody>
+      </p:sp>
+      <p:sp>
+        <p:nvSpPr>
+          <p:cNvPr id="3" name="TextBox 2">
+            <a:extLst>
+              <a:ext uri="{FF2B5EF4-FFF2-40B4-BE49-F238E27FC236}">
+                <a16:creationId xmlns:a16="http://schemas.microsoft.com/office/drawing/2014/main" id="{3A4FE77B-E540-5648-BB03-C8CBADDF7FF5}"/>
+              </a:ext>
+            </a:extLst>
+          </p:cNvPr>
+          <p:cNvSpPr txBox="1"/>
+          <p:nvPr/>
+        </p:nvSpPr>
+        <p:spPr>
+          <a:xfrm>
+            <a:off x="0" y="5156201"/>
+            <a:ext cx="12192000" cy="584775"/>
+          </a:xfrm>
+          <a:prstGeom prst="rect">
+            <a:avLst/>
+          </a:prstGeom>
+          <a:noFill/>
+        </p:spPr>
+        <p:txBody>
+          <a:bodyPr wrap="square" rtlCol="0">
+            <a:spAutoFit/>
+          </a:bodyPr>
+          <a:lstStyle/>
+          <a:p>
+            <a:pPr algn="ctr"/>
+            <a:r>
+              <a:rPr lang="en-US" sz="3200" b="1" dirty="0">
+                <a:solidFill>
+                  <a:srgbClr val="660033"/>
+                </a:solidFill>
+              </a:rPr>
+              <a:t>( 3 / 6 )</a:t>
+            </a:r>
+            <a:endParaRPr lang="vi-VN" sz="3200" b="1" dirty="0">
+              <a:solidFill>
+                <a:srgbClr val="660033"/>
+              </a:solidFill>
+            </a:endParaRPr>
+          </a:p>
+        </p:txBody>
+      </p:sp>
+    </p:spTree>
+    <p:extLst>
+      <p:ext uri="{BB962C8B-B14F-4D97-AF65-F5344CB8AC3E}">
+        <p14:creationId xmlns:p14="http://schemas.microsoft.com/office/powerpoint/2010/main" val="535570627"/>
+      </p:ext>
+    </p:extLst>
+  </p:cSld>
+  <p:clrMapOvr>
+    <a:masterClrMapping/>
+  </p:clrMapOvr>
+</p:sld>
+</file>
+
+<file path=ppt/slides/slide9.xml><?xml version="1.0" encoding="utf-8"?>
+<p:sld xmlns:a="http://schemas.openxmlformats.org/drawingml/2006/main" xmlns:r="http://schemas.openxmlformats.org/officeDocument/2006/relationships" xmlns:p="http://schemas.openxmlformats.org/presentationml/2006/main">
+  <p:cSld>
+    <p:spTree>
+      <p:nvGrpSpPr>
+        <p:cNvPr id="1" name="">
+          <a:extLst>
+            <a:ext uri="{FF2B5EF4-FFF2-40B4-BE49-F238E27FC236}">
+              <a16:creationId xmlns:a16="http://schemas.microsoft.com/office/drawing/2014/main" id="{4964217E-DB53-B957-B61D-145D8F3D88F3}"/>
+            </a:ext>
+          </a:extLst>
+        </p:cNvPr>
+        <p:cNvGrpSpPr/>
+        <p:nvPr/>
+      </p:nvGrpSpPr>
+      <p:grpSpPr>
+        <a:xfrm>
+          <a:off x="0" y="0"/>
+          <a:ext cx="0" cy="0"/>
+          <a:chOff x="0" y="0"/>
+          <a:chExt cx="0" cy="0"/>
+        </a:xfrm>
+      </p:grpSpPr>
+      <p:sp>
+        <p:nvSpPr>
+          <p:cNvPr id="5" name="內容版面配置區 4">
+            <a:extLst>
+              <a:ext uri="{FF2B5EF4-FFF2-40B4-BE49-F238E27FC236}">
+                <a16:creationId xmlns:a16="http://schemas.microsoft.com/office/drawing/2014/main" id="{3129B2E3-1540-42C4-85CC-10B9CEAC4719}"/>
+              </a:ext>
+            </a:extLst>
+          </p:cNvPr>
+          <p:cNvSpPr>
+            <a:spLocks noGrp="1"/>
+          </p:cNvSpPr>
+          <p:nvPr>
+            <p:ph idx="1"/>
+          </p:nvPr>
+        </p:nvSpPr>
+        <p:spPr>
+          <a:xfrm>
+            <a:off x="0" y="2084853"/>
+            <a:ext cx="12192000" cy="2404863"/>
+          </a:xfrm>
+        </p:spPr>
+        <p:txBody>
+          <a:bodyPr anchor="ctr">
+            <a:normAutofit/>
+          </a:bodyPr>
+          <a:lstStyle/>
+          <a:p>
+            <a:pPr marL="0" indent="0" algn="ctr">
+              <a:buNone/>
+            </a:pPr>
+            <a:r>
+              <a:rPr lang="zh-TW" altLang="en-US" sz="6400" b="1" dirty="0">
+                <a:solidFill>
+                  <a:srgbClr val="660033"/>
+                </a:solidFill>
+                <a:latin typeface="Microsoft JhengHei" pitchFamily="34" charset="-120"/>
+                <a:ea typeface="Microsoft JhengHei" pitchFamily="34" charset="-120"/>
+              </a:rPr>
+              <a:t>我時常必保佑  叫苦變成甘</a:t>
+            </a:r>
+          </a:p>
+          <a:p>
+            <a:pPr marL="0" indent="0" algn="ctr">
+              <a:buNone/>
+            </a:pPr>
+            <a:r>
+              <a:rPr lang="zh-TW" altLang="en-US" sz="6400" b="1" dirty="0">
+                <a:solidFill>
+                  <a:srgbClr val="660033"/>
+                </a:solidFill>
+                <a:latin typeface="Microsoft JhengHei" pitchFamily="34" charset="-120"/>
+                <a:ea typeface="Microsoft JhengHei" pitchFamily="34" charset="-120"/>
+              </a:rPr>
+              <a:t>終叫你成聖潔  而永得平安</a:t>
+            </a:r>
+          </a:p>
+        </p:txBody>
+      </p:sp>
+      <p:sp>
+        <p:nvSpPr>
+          <p:cNvPr id="3" name="TextBox 2">
+            <a:extLst>
+              <a:ext uri="{FF2B5EF4-FFF2-40B4-BE49-F238E27FC236}">
+                <a16:creationId xmlns:a16="http://schemas.microsoft.com/office/drawing/2014/main" id="{928E704A-E032-D96D-0970-5C2784456135}"/>
+              </a:ext>
+            </a:extLst>
+          </p:cNvPr>
+          <p:cNvSpPr txBox="1"/>
+          <p:nvPr/>
+        </p:nvSpPr>
+        <p:spPr>
+          <a:xfrm>
+            <a:off x="0" y="5156201"/>
+            <a:ext cx="12192000" cy="584775"/>
+          </a:xfrm>
+          <a:prstGeom prst="rect">
+            <a:avLst/>
+          </a:prstGeom>
+          <a:noFill/>
+        </p:spPr>
+        <p:txBody>
+          <a:bodyPr wrap="square" rtlCol="0">
+            <a:spAutoFit/>
+          </a:bodyPr>
+          <a:lstStyle/>
+          <a:p>
+            <a:pPr algn="ctr"/>
+            <a:r>
+              <a:rPr lang="en-US" sz="3200" b="1" dirty="0">
+                <a:solidFill>
+                  <a:srgbClr val="660033"/>
+                </a:solidFill>
+              </a:rPr>
+              <a:t>( 3 / 6 )</a:t>
+            </a:r>
+            <a:endParaRPr lang="vi-VN" sz="3200" b="1" dirty="0">
+              <a:solidFill>
+                <a:srgbClr val="660033"/>
+              </a:solidFill>
+            </a:endParaRPr>
+          </a:p>
+        </p:txBody>
+      </p:sp>
+    </p:spTree>
+    <p:extLst>
+      <p:ext uri="{BB962C8B-B14F-4D97-AF65-F5344CB8AC3E}">
+        <p14:creationId xmlns:p14="http://schemas.microsoft.com/office/powerpoint/2010/main" val="4078139631"/>
       </p:ext>
     </p:extLst>
   </p:cSld>
